--- a/test-inplace-out.pptx
+++ b/test-inplace-out.pptx
@@ -14,6 +14,8 @@
     <p:sldId id="270" r:id="rId23"/>
     <p:sldId id="271" r:id="rId24"/>
     <p:sldId id="272" r:id="rId25"/>
+    <p:sldId id="273" r:id="rId26"/>
+    <p:sldId id="274" r:id="rId27"/>
   </p:sldIdLst>
   <p:sldSz cx="18288000" cy="10287000"/>
   <p:notesSz cx="6858000" cy="9144000"/>
@@ -3270,13 +3272,13 @@
               </a:lnSpc>
             </a:pPr>
             <a:r>
-              <a:rPr lang="ko-KR" altLang="en-US" sz="2000" b="0" i="0" u="none" strike="noStrike" dirty="0">
+              <a:rPr lang="ko-KR" altLang="en-US" sz="1433" b="0" i="0" u="none" strike="noStrike" dirty="0">
                 <a:solidFill>
                   <a:srgbClr val="2C2C2C"/>
                 </a:solidFill>
                 <a:ea typeface="Pretendard Regular"/>
               </a:rPr>
-              <a:t/>
+              <a:t>김유신</a:t>
             </a:r>
             <a:endParaRPr lang="ko-KR" sz="2000" b="0" i="0" u="none" strike="noStrike" dirty="0">
               <a:solidFill>
@@ -3314,13 +3316,13 @@
               </a:lnSpc>
             </a:pPr>
             <a:r>
-              <a:rPr lang="ko-KR" altLang="en-US" sz="1433" b="0" i="0" u="none" strike="noStrike" dirty="0">
+              <a:rPr lang="ko-KR" altLang="en-US" sz="2000" b="0" i="0" u="none" strike="noStrike" dirty="0">
                 <a:solidFill>
                   <a:srgbClr val="2C2C2C"/>
                 </a:solidFill>
                 <a:ea typeface="Pretendard Bold"/>
               </a:rPr>
-              <a:t>개선</a:t>
+              <a:t/>
             </a:r>
           </a:p>
         </p:txBody>
@@ -3352,13 +3354,13 @@
               </a:lnSpc>
             </a:pPr>
             <a:r>
-              <a:rPr lang="ko-KR" altLang="en-US" sz="1433" b="0" i="0" u="none" strike="noStrike" dirty="0">
+              <a:rPr lang="ko-KR" altLang="en-US" sz="2000" b="0" i="0" u="none" strike="noStrike" dirty="0">
                 <a:solidFill>
                   <a:srgbClr val="2C2C2C"/>
                 </a:solidFill>
                 <a:ea typeface="Pretendard Regular"/>
               </a:rPr>
-              <a:t>검증</a:t>
+              <a:t/>
             </a:r>
             <a:endParaRPr lang="ko-KR" sz="2000" b="0" i="0" u="none" strike="noStrike" dirty="0">
               <a:solidFill>
@@ -3396,14 +3398,14 @@
               </a:lnSpc>
             </a:pPr>
             <a:r>
-              <a:rPr lang="ko-KR" altLang="en-US" sz="1433" dirty="0">
+              <a:rPr lang="ko-KR" altLang="en-US" sz="2000" dirty="0">
                 <a:solidFill>
                   <a:srgbClr val="2C2C2C"/>
                 </a:solidFill>
                 <a:latin typeface="Pretendard Bold"/>
                 <a:ea typeface="Pretendard Bold"/>
               </a:rPr>
-              <a:t>성장</a:t>
+              <a:t/>
             </a:r>
           </a:p>
         </p:txBody>
@@ -3477,7 +3479,7 @@
               <a:rPr lang="ko-KR" altLang="en-US" sz="7200" b="0" i="0" u="none" strike="noStrike" dirty="0">
                 <a:ea typeface="Pretendard ExtraBold"/>
               </a:rPr>
-              <a:t>코코네</a:t>
+              <a:t>코코네 프론트엔드 개발자</a:t>
             </a:r>
             <a:endParaRPr lang="ko-KR" sz="7200" b="0" i="0" u="none" strike="noStrike" dirty="0">
               <a:ea typeface="Pretendard ExtraBold"/>
@@ -3564,6 +3566,1420 @@
                 <a:srgbClr val="207CD7"/>
               </a:solidFill>
               <a:latin typeface="Pretendard Regular"/>
+            </a:endParaRPr>
+          </a:p>
+        </p:txBody>
+      </p:sp>
+    </p:spTree>
+  </p:cSld>
+  <p:clrMapOvr>
+    <a:masterClrMapping/>
+  </p:clrMapOvr>
+</p:sld>
+</file>
+
+<file path=ppt/slides/slide10.xml><?xml version="1.0" encoding="utf-8"?>
+<p:sld xmlns:a="http://schemas.openxmlformats.org/drawingml/2006/main" xmlns:r="http://schemas.openxmlformats.org/officeDocument/2006/relationships" xmlns:p="http://schemas.openxmlformats.org/presentationml/2006/main">
+  <p:cSld>
+    <p:bg>
+      <p:bgPr>
+        <a:solidFill>
+          <a:srgbClr val="FCFCFC"/>
+        </a:solidFill>
+        <a:effectLst/>
+      </p:bgPr>
+    </p:bg>
+    <p:spTree>
+      <p:nvGrpSpPr>
+        <p:cNvPr id="1" name=""/>
+        <p:cNvGrpSpPr/>
+        <p:nvPr/>
+      </p:nvGrpSpPr>
+      <p:grpSpPr>
+        <a:xfrm>
+          <a:off x="0" y="0"/>
+          <a:ext cx="0" cy="0"/>
+          <a:chOff x="0" y="0"/>
+          <a:chExt cx="0" cy="0"/>
+        </a:xfrm>
+      </p:grpSpPr>
+      <p:grpSp>
+        <p:nvGrpSpPr>
+          <p:cNvPr id="2" name="Group 2"/>
+          <p:cNvGrpSpPr/>
+          <p:nvPr/>
+        </p:nvGrpSpPr>
+        <p:grpSpPr>
+          <a:xfrm>
+            <a:off x="-2147483648" y="-1600669900"/>
+            <a:ext cx="2147483647" cy="2147483647"/>
+            <a:chOff x="0" y="0"/>
+            <a:chExt cx="0" cy="0"/>
+          </a:xfrm>
+        </p:grpSpPr>
+      </p:grpSp>
+      <p:pic>
+        <p:nvPicPr>
+          <p:cNvPr id="3" name="Picture 3"/>
+          <p:cNvPicPr>
+            <a:picLocks noChangeAspect="1"/>
+          </p:cNvPicPr>
+          <p:nvPr/>
+        </p:nvPicPr>
+        <p:blipFill>
+          <a:blip r:embed="rId2"/>
+          <a:stretch>
+            <a:fillRect/>
+          </a:stretch>
+        </p:blipFill>
+        <p:spPr>
+          <a:xfrm>
+            <a:off x="0" y="-114300"/>
+            <a:ext cx="190500" cy="10528300"/>
+          </a:xfrm>
+          <a:prstGeom prst="rect">
+            <a:avLst/>
+          </a:prstGeom>
+        </p:spPr>
+      </p:pic>
+      <p:pic>
+        <p:nvPicPr>
+          <p:cNvPr id="4" name="Picture 4"/>
+          <p:cNvPicPr>
+            <a:picLocks noChangeAspect="1"/>
+          </p:cNvPicPr>
+          <p:nvPr/>
+        </p:nvPicPr>
+        <p:blipFill>
+          <a:blip r:embed="rId3"/>
+          <a:stretch>
+            <a:fillRect/>
+          </a:stretch>
+        </p:blipFill>
+        <p:spPr>
+          <a:xfrm>
+            <a:off x="-266700" y="4279900"/>
+            <a:ext cx="863600" cy="1727200"/>
+          </a:xfrm>
+          <a:prstGeom prst="rect">
+            <a:avLst/>
+          </a:prstGeom>
+        </p:spPr>
+      </p:pic>
+      <p:pic>
+        <p:nvPicPr>
+          <p:cNvPr id="8" name="Picture 8"/>
+          <p:cNvPicPr>
+            <a:picLocks noChangeAspect="1"/>
+          </p:cNvPicPr>
+          <p:nvPr/>
+        </p:nvPicPr>
+        <p:blipFill>
+          <a:blip r:embed="rId5"/>
+          <a:stretch>
+            <a:fillRect/>
+          </a:stretch>
+        </p:blipFill>
+        <p:spPr>
+          <a:xfrm rot="5400000">
+            <a:off x="9271000" y="7937500"/>
+            <a:ext cx="1943100" cy="25400"/>
+          </a:xfrm>
+          <a:prstGeom prst="rect">
+            <a:avLst/>
+          </a:prstGeom>
+        </p:spPr>
+      </p:pic>
+      <p:pic>
+        <p:nvPicPr>
+          <p:cNvPr id="10" name="Picture 10"/>
+          <p:cNvPicPr>
+            <a:picLocks noChangeAspect="1"/>
+          </p:cNvPicPr>
+          <p:nvPr/>
+        </p:nvPicPr>
+        <p:blipFill>
+          <a:blip r:embed="rId5"/>
+          <a:stretch>
+            <a:fillRect/>
+          </a:stretch>
+        </p:blipFill>
+        <p:spPr>
+          <a:xfrm rot="5400000">
+            <a:off x="9271000" y="2336800"/>
+            <a:ext cx="1943100" cy="25400"/>
+          </a:xfrm>
+          <a:prstGeom prst="rect">
+            <a:avLst/>
+          </a:prstGeom>
+        </p:spPr>
+      </p:pic>
+      <p:pic>
+        <p:nvPicPr>
+          <p:cNvPr id="11" name="Picture 11"/>
+          <p:cNvPicPr>
+            <a:picLocks noChangeAspect="1"/>
+          </p:cNvPicPr>
+          <p:nvPr/>
+        </p:nvPicPr>
+        <p:blipFill>
+          <a:blip r:embed="rId6"/>
+          <a:stretch>
+            <a:fillRect/>
+          </a:stretch>
+        </p:blipFill>
+        <p:spPr>
+          <a:xfrm rot="5400000">
+            <a:off x="838200" y="5130800"/>
+            <a:ext cx="9525000" cy="25400"/>
+          </a:xfrm>
+          <a:prstGeom prst="rect">
+            <a:avLst/>
+          </a:prstGeom>
+        </p:spPr>
+      </p:pic>
+      <p:pic>
+        <p:nvPicPr>
+          <p:cNvPr id="12" name="Picture 12"/>
+          <p:cNvPicPr>
+            <a:picLocks noChangeAspect="1"/>
+          </p:cNvPicPr>
+          <p:nvPr/>
+        </p:nvPicPr>
+        <p:blipFill>
+          <a:blip r:embed="rId7"/>
+          <a:stretch>
+            <a:fillRect/>
+          </a:stretch>
+        </p:blipFill>
+        <p:spPr>
+          <a:xfrm>
+            <a:off x="1574800" y="3797300"/>
+            <a:ext cx="381000" cy="50800"/>
+          </a:xfrm>
+          <a:prstGeom prst="rect">
+            <a:avLst/>
+          </a:prstGeom>
+        </p:spPr>
+      </p:pic>
+      <p:sp>
+        <p:nvSpPr>
+          <p:cNvPr id="13" name="TextBox 13"/>
+          <p:cNvSpPr txBox="1"/>
+          <p:nvPr/>
+        </p:nvSpPr>
+        <p:spPr>
+          <a:xfrm>
+            <a:off x="10795000" y="7353300"/>
+            <a:ext cx="5664200" cy="1219200"/>
+          </a:xfrm>
+          <a:prstGeom prst="rect">
+            <a:avLst/>
+          </a:prstGeom>
+        </p:spPr>
+        <p:txBody>
+          <a:bodyPr lIns="0" tIns="0" rIns="0" bIns="0" rtlCol="0" anchor="t">
+            <a:noAutofit/>
+          </a:bodyPr>
+          <a:lstStyle/>
+          <a:p>
+            <a:pPr marL="342900" lvl="0" indent="-342900" algn="l">
+              <a:lnSpc>
+                <a:spcPct val="132800"/>
+              </a:lnSpc>
+              <a:buClr>
+                <a:srgbClr val="2C2C2C"/>
+              </a:buClr>
+              <a:buFont typeface="Arial"/>
+              <a:buChar char="●"/>
+            </a:pPr>
+            <a:r>
+              <a:rPr lang="ko-KR" sz="2100" b="0" i="0" u="none" strike="noStrike">
+                <a:solidFill>
+                  <a:srgbClr val="2C2C2C"/>
+                </a:solidFill>
+                <a:ea typeface="Pretendard Regular"/>
+              </a:rPr>
+              <a:t>자격증</a:t>
+            </a:r>
+          </a:p>
+        </p:txBody>
+      </p:sp>
+      <p:sp>
+        <p:nvSpPr>
+          <p:cNvPr id="14" name="TextBox 14"/>
+          <p:cNvSpPr txBox="1"/>
+          <p:nvPr/>
+        </p:nvSpPr>
+        <p:spPr>
+          <a:xfrm>
+            <a:off x="7620000" y="7810500"/>
+            <a:ext cx="2133600" cy="495300"/>
+          </a:xfrm>
+          <a:prstGeom prst="rect">
+            <a:avLst/>
+          </a:prstGeom>
+        </p:spPr>
+        <p:txBody>
+          <a:bodyPr lIns="0" tIns="0" rIns="0" bIns="0" rtlCol="0" anchor="t">
+            <a:noAutofit/>
+          </a:bodyPr>
+          <a:lstStyle/>
+          <a:p>
+            <a:pPr lvl="0" algn="l">
+              <a:lnSpc>
+                <a:spcPct val="116199"/>
+              </a:lnSpc>
+            </a:pPr>
+            <a:r>
+              <a:rPr lang="ko-KR" sz="2800" b="0" i="0" u="none" strike="noStrike">
+                <a:solidFill>
+                  <a:srgbClr val="2C2C2C"/>
+                </a:solidFill>
+                <a:ea typeface="Pretendard Bold"/>
+              </a:rPr>
+              <a:t/>
+            </a:r>
+          </a:p>
+        </p:txBody>
+      </p:sp>
+      <p:sp>
+        <p:nvSpPr>
+          <p:cNvPr id="15" name="TextBox 15"/>
+          <p:cNvSpPr txBox="1"/>
+          <p:nvPr/>
+        </p:nvSpPr>
+        <p:spPr>
+          <a:xfrm>
+            <a:off x="7620000" y="7493000"/>
+            <a:ext cx="939800" cy="330200"/>
+          </a:xfrm>
+          <a:prstGeom prst="rect">
+            <a:avLst/>
+          </a:prstGeom>
+        </p:spPr>
+        <p:txBody>
+          <a:bodyPr lIns="0" tIns="0" rIns="0" bIns="0" rtlCol="0" anchor="t">
+            <a:noAutofit/>
+          </a:bodyPr>
+          <a:lstStyle/>
+          <a:p>
+            <a:pPr lvl="0" algn="l">
+              <a:lnSpc>
+                <a:spcPct val="116199"/>
+              </a:lnSpc>
+            </a:pPr>
+            <a:r>
+              <a:rPr lang="ko-KR" sz="1800" b="0" i="0" u="none" strike="noStrike">
+                <a:solidFill>
+                  <a:srgbClr val="9CB8D0"/>
+                </a:solidFill>
+                <a:ea typeface="Pretendard Bold"/>
+              </a:rPr>
+              <a:t/>
+            </a:r>
+          </a:p>
+        </p:txBody>
+      </p:sp>
+      <p:sp>
+        <p:nvSpPr>
+          <p:cNvPr id="19" name="TextBox 19"/>
+          <p:cNvSpPr txBox="1"/>
+          <p:nvPr/>
+        </p:nvSpPr>
+        <p:spPr>
+          <a:xfrm>
+            <a:off x="10795000" y="1752600"/>
+            <a:ext cx="5664200" cy="1219200"/>
+          </a:xfrm>
+          <a:prstGeom prst="rect">
+            <a:avLst/>
+          </a:prstGeom>
+        </p:spPr>
+        <p:txBody>
+          <a:bodyPr lIns="0" tIns="0" rIns="0" bIns="0" rtlCol="0" anchor="t">
+            <a:noAutofit/>
+          </a:bodyPr>
+          <a:lstStyle/>
+          <a:p>
+            <a:pPr marL="342900" lvl="0" indent="-342900" algn="l">
+              <a:lnSpc>
+                <a:spcPct val="132800"/>
+              </a:lnSpc>
+              <a:buClr>
+                <a:srgbClr val="2C2C2C"/>
+              </a:buClr>
+              <a:buFont typeface="Arial"/>
+              <a:buChar char="●"/>
+            </a:pPr>
+            <a:r>
+              <a:rPr lang="ko-KR" sz="2100" b="0" i="0" u="none" strike="noStrike">
+                <a:solidFill>
+                  <a:srgbClr val="2C2C2C"/>
+                </a:solidFill>
+                <a:ea typeface="Pretendard Regular"/>
+              </a:rPr>
+              <a:t/>
+            </a:r>
+          </a:p>
+        </p:txBody>
+      </p:sp>
+      <p:sp>
+        <p:nvSpPr>
+          <p:cNvPr id="20" name="TextBox 20"/>
+          <p:cNvSpPr txBox="1"/>
+          <p:nvPr/>
+        </p:nvSpPr>
+        <p:spPr>
+          <a:xfrm>
+            <a:off x="7620000" y="2209800"/>
+            <a:ext cx="2133600" cy="495300"/>
+          </a:xfrm>
+          <a:prstGeom prst="rect">
+            <a:avLst/>
+          </a:prstGeom>
+        </p:spPr>
+        <p:txBody>
+          <a:bodyPr lIns="0" tIns="0" rIns="0" bIns="0" rtlCol="0" anchor="t">
+            <a:noAutofit/>
+          </a:bodyPr>
+          <a:lstStyle/>
+          <a:p>
+            <a:pPr lvl="0" algn="l">
+              <a:lnSpc>
+                <a:spcPct val="116199"/>
+              </a:lnSpc>
+            </a:pPr>
+            <a:r>
+              <a:rPr lang="ko-KR" sz="2370" b="0" i="0" u="none" strike="noStrike">
+                <a:solidFill>
+                  <a:srgbClr val="2C2C2C"/>
+                </a:solidFill>
+                <a:ea typeface="Pretendard Bold"/>
+              </a:rPr>
+              <a:t>2025.11</a:t>
+            </a:r>
+          </a:p>
+        </p:txBody>
+      </p:sp>
+      <p:sp>
+        <p:nvSpPr>
+          <p:cNvPr id="21" name="TextBox 21"/>
+          <p:cNvSpPr txBox="1"/>
+          <p:nvPr/>
+        </p:nvSpPr>
+        <p:spPr>
+          <a:xfrm>
+            <a:off x="7620000" y="1892300"/>
+            <a:ext cx="939800" cy="330200"/>
+          </a:xfrm>
+          <a:prstGeom prst="rect">
+            <a:avLst/>
+          </a:prstGeom>
+        </p:spPr>
+        <p:txBody>
+          <a:bodyPr lIns="0" tIns="0" rIns="0" bIns="0" rtlCol="0" anchor="t">
+            <a:noAutofit/>
+          </a:bodyPr>
+          <a:lstStyle/>
+          <a:p>
+            <a:pPr lvl="0" algn="l">
+              <a:lnSpc>
+                <a:spcPct val="116199"/>
+              </a:lnSpc>
+            </a:pPr>
+            <a:r>
+              <a:rPr lang="ko-KR" sz="1290" b="0" i="0" u="none" strike="noStrike">
+                <a:solidFill>
+                  <a:srgbClr val="9CB8D0"/>
+                </a:solidFill>
+                <a:ea typeface="Pretendard Bold"/>
+              </a:rPr>
+              <a:t>대상</a:t>
+            </a:r>
+          </a:p>
+        </p:txBody>
+      </p:sp>
+      <p:sp>
+        <p:nvSpPr>
+          <p:cNvPr id="22" name="TextBox 22"/>
+          <p:cNvSpPr txBox="1"/>
+          <p:nvPr/>
+        </p:nvSpPr>
+        <p:spPr>
+          <a:xfrm>
+            <a:off x="1524000" y="4013200"/>
+            <a:ext cx="3416300" cy="1168400"/>
+          </a:xfrm>
+          <a:prstGeom prst="rect">
+            <a:avLst/>
+          </a:prstGeom>
+        </p:spPr>
+        <p:txBody>
+          <a:bodyPr lIns="0" tIns="0" rIns="0" bIns="0" rtlCol="0" anchor="t">
+            <a:noAutofit/>
+          </a:bodyPr>
+          <a:lstStyle/>
+          <a:p>
+            <a:pPr lvl="0" algn="l">
+              <a:lnSpc>
+                <a:spcPct val="132800"/>
+              </a:lnSpc>
+            </a:pPr>
+            <a:r>
+              <a:rPr lang="en-US" sz="2000" b="0" i="0" u="none" strike="noStrike">
+                <a:solidFill>
+                  <a:srgbClr val="2C2C2C"/>
+                </a:solidFill>
+                <a:latin typeface="Pretendard Regular"/>
+              </a:rPr>
+              <a:t>가천대학교 · 2025.11</a:t>
+            </a:r>
+          </a:p>
+        </p:txBody>
+      </p:sp>
+      <p:sp>
+        <p:nvSpPr>
+          <p:cNvPr id="23" name="TextBox 23"/>
+          <p:cNvSpPr txBox="1"/>
+          <p:nvPr/>
+        </p:nvSpPr>
+        <p:spPr>
+          <a:xfrm>
+            <a:off x="1574800" y="2933700"/>
+            <a:ext cx="2209800" cy="355600"/>
+          </a:xfrm>
+          <a:prstGeom prst="rect">
+            <a:avLst/>
+          </a:prstGeom>
+        </p:spPr>
+        <p:txBody>
+          <a:bodyPr lIns="0" tIns="0" rIns="0" bIns="0" rtlCol="0" anchor="t">
+            <a:noAutofit/>
+          </a:bodyPr>
+          <a:lstStyle/>
+          <a:p>
+            <a:pPr lvl="0" algn="l">
+              <a:lnSpc>
+                <a:spcPct val="99600"/>
+              </a:lnSpc>
+            </a:pPr>
+            <a:r>
+              <a:rPr lang="en-US" sz="1433" b="0" i="0" u="none" strike="noStrike">
+                <a:solidFill>
+                  <a:srgbClr val="207CD7"/>
+                </a:solidFill>
+                <a:latin typeface="Pretendard Bold"/>
+              </a:rPr>
+              <a:t>가천대학교</a:t>
+            </a:r>
+          </a:p>
+        </p:txBody>
+      </p:sp>
+      <p:sp>
+        <p:nvSpPr>
+          <p:cNvPr id="24" name="TextBox 24"/>
+          <p:cNvSpPr txBox="1"/>
+          <p:nvPr/>
+        </p:nvSpPr>
+        <p:spPr>
+          <a:xfrm>
+            <a:off x="666750" y="901700"/>
+            <a:ext cx="4584700" cy="1981200"/>
+          </a:xfrm>
+          <a:prstGeom prst="rect">
+            <a:avLst/>
+          </a:prstGeom>
+        </p:spPr>
+        <p:txBody>
+          <a:bodyPr lIns="0" tIns="0" rIns="0" bIns="0" rtlCol="0" anchor="t">
+            <a:noAutofit/>
+          </a:bodyPr>
+          <a:lstStyle/>
+          <a:p>
+            <a:pPr lvl="0" algn="l">
+              <a:lnSpc>
+                <a:spcPct val="99600"/>
+              </a:lnSpc>
+            </a:pPr>
+            <a:r>
+              <a:rPr lang="en-US" sz="5520" b="0" i="0" u="none" strike="noStrike" dirty="0">
+                <a:solidFill>
+                  <a:srgbClr val="2C2C2C"/>
+                </a:solidFill>
+                <a:latin typeface="Pretendard ExtraBold"/>
+              </a:rPr>
+              <a:t>교내 해커톤 대상</a:t>
+            </a:r>
+            <a:endParaRPr lang="ko-KR" sz="6000" b="0" i="0" u="none" strike="noStrike" dirty="0">
+              <a:solidFill>
+                <a:srgbClr val="2C2C2C"/>
+              </a:solidFill>
+              <a:ea typeface="Pretendard ExtraBold"/>
+            </a:endParaRPr>
+          </a:p>
+        </p:txBody>
+      </p:sp>
+    </p:spTree>
+  </p:cSld>
+  <p:clrMapOvr>
+    <a:masterClrMapping/>
+  </p:clrMapOvr>
+</p:sld>
+</file>
+
+<file path=ppt/slides/slide11.xml><?xml version="1.0" encoding="utf-8"?>
+<p:sld xmlns:a="http://schemas.openxmlformats.org/drawingml/2006/main" xmlns:r="http://schemas.openxmlformats.org/officeDocument/2006/relationships" xmlns:p="http://schemas.openxmlformats.org/presentationml/2006/main">
+  <p:cSld>
+    <p:bg>
+      <p:bgPr>
+        <a:solidFill>
+          <a:srgbClr val="FCFCFC"/>
+        </a:solidFill>
+        <a:effectLst/>
+      </p:bgPr>
+    </p:bg>
+    <p:spTree>
+      <p:nvGrpSpPr>
+        <p:cNvPr id="1" name=""/>
+        <p:cNvGrpSpPr/>
+        <p:nvPr/>
+      </p:nvGrpSpPr>
+      <p:grpSpPr>
+        <a:xfrm>
+          <a:off x="0" y="0"/>
+          <a:ext cx="0" cy="0"/>
+          <a:chOff x="0" y="0"/>
+          <a:chExt cx="0" cy="0"/>
+        </a:xfrm>
+      </p:grpSpPr>
+      <p:grpSp>
+        <p:nvGrpSpPr>
+          <p:cNvPr id="2" name="Group 2"/>
+          <p:cNvGrpSpPr/>
+          <p:nvPr/>
+        </p:nvGrpSpPr>
+        <p:grpSpPr>
+          <a:xfrm>
+            <a:off x="-2147483648" y="-1600669900"/>
+            <a:ext cx="2147483647" cy="2147483647"/>
+            <a:chOff x="0" y="0"/>
+            <a:chExt cx="0" cy="0"/>
+          </a:xfrm>
+        </p:grpSpPr>
+      </p:grpSp>
+      <p:pic>
+        <p:nvPicPr>
+          <p:cNvPr id="3" name="Picture 3"/>
+          <p:cNvPicPr>
+            <a:picLocks noChangeAspect="1"/>
+          </p:cNvPicPr>
+          <p:nvPr/>
+        </p:nvPicPr>
+        <p:blipFill>
+          <a:blip r:embed="rId2"/>
+          <a:stretch>
+            <a:fillRect/>
+          </a:stretch>
+        </p:blipFill>
+        <p:spPr>
+          <a:xfrm>
+            <a:off x="0" y="-114300"/>
+            <a:ext cx="190500" cy="10528300"/>
+          </a:xfrm>
+          <a:prstGeom prst="rect">
+            <a:avLst/>
+          </a:prstGeom>
+        </p:spPr>
+      </p:pic>
+      <p:pic>
+        <p:nvPicPr>
+          <p:cNvPr id="4" name="Picture 4"/>
+          <p:cNvPicPr>
+            <a:picLocks noChangeAspect="1"/>
+          </p:cNvPicPr>
+          <p:nvPr/>
+        </p:nvPicPr>
+        <p:blipFill>
+          <a:blip r:embed="rId3"/>
+          <a:stretch>
+            <a:fillRect/>
+          </a:stretch>
+        </p:blipFill>
+        <p:spPr>
+          <a:xfrm>
+            <a:off x="-266700" y="4279900"/>
+            <a:ext cx="863600" cy="1727200"/>
+          </a:xfrm>
+          <a:prstGeom prst="rect">
+            <a:avLst/>
+          </a:prstGeom>
+        </p:spPr>
+      </p:pic>
+      <p:pic>
+        <p:nvPicPr>
+          <p:cNvPr id="5" name="Picture 5"/>
+          <p:cNvPicPr>
+            <a:picLocks noChangeAspect="1"/>
+          </p:cNvPicPr>
+          <p:nvPr/>
+        </p:nvPicPr>
+        <p:blipFill>
+          <a:blip r:embed="rId4"/>
+          <a:stretch>
+            <a:fillRect/>
+          </a:stretch>
+        </p:blipFill>
+        <p:spPr>
+          <a:xfrm>
+            <a:off x="6680200" y="8382000"/>
+            <a:ext cx="10490200" cy="863600"/>
+          </a:xfrm>
+          <a:prstGeom prst="rect">
+            <a:avLst/>
+          </a:prstGeom>
+        </p:spPr>
+      </p:pic>
+      <p:pic>
+        <p:nvPicPr>
+          <p:cNvPr id="6" name="Picture 6"/>
+          <p:cNvPicPr>
+            <a:picLocks noChangeAspect="1"/>
+          </p:cNvPicPr>
+          <p:nvPr/>
+        </p:nvPicPr>
+        <p:blipFill>
+          <a:blip r:embed="rId4"/>
+          <a:stretch>
+            <a:fillRect/>
+          </a:stretch>
+        </p:blipFill>
+        <p:spPr>
+          <a:xfrm>
+            <a:off x="6680200" y="7454900"/>
+            <a:ext cx="10490200" cy="863600"/>
+          </a:xfrm>
+          <a:prstGeom prst="rect">
+            <a:avLst/>
+          </a:prstGeom>
+        </p:spPr>
+      </p:pic>
+      <p:pic>
+        <p:nvPicPr>
+          <p:cNvPr id="7" name="Picture 7"/>
+          <p:cNvPicPr>
+            <a:picLocks noChangeAspect="1"/>
+          </p:cNvPicPr>
+          <p:nvPr/>
+        </p:nvPicPr>
+        <p:blipFill>
+          <a:blip r:embed="rId5"/>
+          <a:stretch>
+            <a:fillRect/>
+          </a:stretch>
+        </p:blipFill>
+        <p:spPr>
+          <a:xfrm>
+            <a:off x="6680200" y="6527800"/>
+            <a:ext cx="10490200" cy="863600"/>
+          </a:xfrm>
+          <a:prstGeom prst="rect">
+            <a:avLst/>
+          </a:prstGeom>
+        </p:spPr>
+      </p:pic>
+      <p:pic>
+        <p:nvPicPr>
+          <p:cNvPr id="8" name="Picture 8"/>
+          <p:cNvPicPr>
+            <a:picLocks noChangeAspect="1"/>
+          </p:cNvPicPr>
+          <p:nvPr/>
+        </p:nvPicPr>
+        <p:blipFill>
+          <a:blip r:embed="rId5"/>
+          <a:stretch>
+            <a:fillRect/>
+          </a:stretch>
+        </p:blipFill>
+        <p:spPr>
+          <a:xfrm>
+            <a:off x="6680200" y="5588000"/>
+            <a:ext cx="10490200" cy="863600"/>
+          </a:xfrm>
+          <a:prstGeom prst="rect">
+            <a:avLst/>
+          </a:prstGeom>
+        </p:spPr>
+      </p:pic>
+      <p:pic>
+        <p:nvPicPr>
+          <p:cNvPr id="9" name="Picture 9"/>
+          <p:cNvPicPr>
+            <a:picLocks noChangeAspect="1"/>
+          </p:cNvPicPr>
+          <p:nvPr/>
+        </p:nvPicPr>
+        <p:blipFill>
+          <a:blip r:embed="rId6"/>
+          <a:stretch>
+            <a:fillRect/>
+          </a:stretch>
+        </p:blipFill>
+        <p:spPr>
+          <a:xfrm>
+            <a:off x="6680200" y="4622800"/>
+            <a:ext cx="10490200" cy="863600"/>
+          </a:xfrm>
+          <a:prstGeom prst="rect">
+            <a:avLst/>
+          </a:prstGeom>
+        </p:spPr>
+      </p:pic>
+      <p:pic>
+        <p:nvPicPr>
+          <p:cNvPr id="13" name="Picture 13"/>
+          <p:cNvPicPr>
+            <a:picLocks noChangeAspect="1"/>
+          </p:cNvPicPr>
+          <p:nvPr/>
+        </p:nvPicPr>
+        <p:blipFill>
+          <a:blip r:embed="rId6"/>
+          <a:stretch>
+            <a:fillRect/>
+          </a:stretch>
+        </p:blipFill>
+        <p:spPr>
+          <a:xfrm>
+            <a:off x="6731000" y="1028700"/>
+            <a:ext cx="10490200" cy="863600"/>
+          </a:xfrm>
+          <a:prstGeom prst="rect">
+            <a:avLst/>
+          </a:prstGeom>
+        </p:spPr>
+      </p:pic>
+      <p:pic>
+        <p:nvPicPr>
+          <p:cNvPr id="14" name="Picture 14"/>
+          <p:cNvPicPr>
+            <a:picLocks noChangeAspect="1"/>
+          </p:cNvPicPr>
+          <p:nvPr/>
+        </p:nvPicPr>
+        <p:blipFill>
+          <a:blip r:embed="rId8"/>
+          <a:stretch>
+            <a:fillRect/>
+          </a:stretch>
+        </p:blipFill>
+        <p:spPr>
+          <a:xfrm rot="5400000">
+            <a:off x="838200" y="5130800"/>
+            <a:ext cx="9525000" cy="25400"/>
+          </a:xfrm>
+          <a:prstGeom prst="rect">
+            <a:avLst/>
+          </a:prstGeom>
+        </p:spPr>
+      </p:pic>
+      <p:pic>
+        <p:nvPicPr>
+          <p:cNvPr id="15" name="Picture 15"/>
+          <p:cNvPicPr>
+            <a:picLocks noChangeAspect="1"/>
+          </p:cNvPicPr>
+          <p:nvPr/>
+        </p:nvPicPr>
+        <p:blipFill>
+          <a:blip r:embed="rId9"/>
+          <a:stretch>
+            <a:fillRect/>
+          </a:stretch>
+        </p:blipFill>
+        <p:spPr>
+          <a:xfrm>
+            <a:off x="1574800" y="3797300"/>
+            <a:ext cx="381000" cy="50800"/>
+          </a:xfrm>
+          <a:prstGeom prst="rect">
+            <a:avLst/>
+          </a:prstGeom>
+        </p:spPr>
+      </p:pic>
+      <p:sp>
+        <p:nvSpPr>
+          <p:cNvPr id="16" name="TextBox 16"/>
+          <p:cNvSpPr txBox="1"/>
+          <p:nvPr/>
+        </p:nvSpPr>
+        <p:spPr>
+          <a:xfrm>
+            <a:off x="10325100" y="8585200"/>
+            <a:ext cx="3200400" cy="495300"/>
+          </a:xfrm>
+          <a:prstGeom prst="rect">
+            <a:avLst/>
+          </a:prstGeom>
+        </p:spPr>
+        <p:txBody>
+          <a:bodyPr lIns="0" tIns="0" rIns="0" bIns="0" rtlCol="0" anchor="t">
+            <a:noAutofit/>
+          </a:bodyPr>
+          <a:lstStyle/>
+          <a:p>
+            <a:pPr lvl="0" algn="ctr">
+              <a:lnSpc>
+                <a:spcPct val="99600"/>
+              </a:lnSpc>
+            </a:pPr>
+            <a:r>
+              <a:rPr lang="en-US" sz="2800" b="0" i="0" u="none" strike="noStrike">
+                <a:solidFill>
+                  <a:srgbClr val="2C2C2C"/>
+                </a:solidFill>
+                <a:latin typeface="Pretendard Bold"/>
+              </a:rPr>
+              <a:t/>
+            </a:r>
+          </a:p>
+        </p:txBody>
+      </p:sp>
+      <p:sp>
+        <p:nvSpPr>
+          <p:cNvPr id="17" name="TextBox 17"/>
+          <p:cNvSpPr txBox="1"/>
+          <p:nvPr/>
+        </p:nvSpPr>
+        <p:spPr>
+          <a:xfrm>
+            <a:off x="10325100" y="7645400"/>
+            <a:ext cx="3200400" cy="495300"/>
+          </a:xfrm>
+          <a:prstGeom prst="rect">
+            <a:avLst/>
+          </a:prstGeom>
+        </p:spPr>
+        <p:txBody>
+          <a:bodyPr lIns="0" tIns="0" rIns="0" bIns="0" rtlCol="0" anchor="t">
+            <a:noAutofit/>
+          </a:bodyPr>
+          <a:lstStyle/>
+          <a:p>
+            <a:pPr lvl="0" algn="ctr">
+              <a:lnSpc>
+                <a:spcPct val="99600"/>
+              </a:lnSpc>
+            </a:pPr>
+            <a:r>
+              <a:rPr lang="en-US" sz="2370" b="0" i="0" u="none" strike="noStrike">
+                <a:solidFill>
+                  <a:srgbClr val="2C2C2C"/>
+                </a:solidFill>
+                <a:latin typeface="Pretendard Bold"/>
+              </a:rPr>
+              <a:t>링크</a:t>
+            </a:r>
+          </a:p>
+        </p:txBody>
+      </p:sp>
+      <p:sp>
+        <p:nvSpPr>
+          <p:cNvPr id="18" name="TextBox 18"/>
+          <p:cNvSpPr txBox="1"/>
+          <p:nvPr/>
+        </p:nvSpPr>
+        <p:spPr>
+          <a:xfrm>
+            <a:off x="10325100" y="6718300"/>
+            <a:ext cx="3200400" cy="495300"/>
+          </a:xfrm>
+          <a:prstGeom prst="rect">
+            <a:avLst/>
+          </a:prstGeom>
+        </p:spPr>
+        <p:txBody>
+          <a:bodyPr lIns="0" tIns="0" rIns="0" bIns="0" rtlCol="0" anchor="t">
+            <a:noAutofit/>
+          </a:bodyPr>
+          <a:lstStyle/>
+          <a:p>
+            <a:pPr lvl="0" algn="ctr">
+              <a:lnSpc>
+                <a:spcPct val="99600"/>
+              </a:lnSpc>
+            </a:pPr>
+            <a:r>
+              <a:rPr lang="en-US" sz="2800" b="0" i="0" u="none" strike="noStrike">
+                <a:solidFill>
+                  <a:srgbClr val="2C2C2C"/>
+                </a:solidFill>
+                <a:latin typeface="Pretendard Bold"/>
+              </a:rPr>
+              <a:t/>
+            </a:r>
+          </a:p>
+        </p:txBody>
+      </p:sp>
+      <p:sp>
+        <p:nvSpPr>
+          <p:cNvPr id="19" name="TextBox 19"/>
+          <p:cNvSpPr txBox="1"/>
+          <p:nvPr/>
+        </p:nvSpPr>
+        <p:spPr>
+          <a:xfrm>
+            <a:off x="10325100" y="5791200"/>
+            <a:ext cx="3200400" cy="495300"/>
+          </a:xfrm>
+          <a:prstGeom prst="rect">
+            <a:avLst/>
+          </a:prstGeom>
+        </p:spPr>
+        <p:txBody>
+          <a:bodyPr lIns="0" tIns="0" rIns="0" bIns="0" rtlCol="0" anchor="t">
+            <a:noAutofit/>
+          </a:bodyPr>
+          <a:lstStyle/>
+          <a:p>
+            <a:pPr lvl="0" algn="ctr">
+              <a:lnSpc>
+                <a:spcPct val="99600"/>
+              </a:lnSpc>
+            </a:pPr>
+            <a:r>
+              <a:rPr lang="en-US" sz="2800" b="0" i="0" u="none" strike="noStrike">
+                <a:solidFill>
+                  <a:srgbClr val="2C2C2C"/>
+                </a:solidFill>
+                <a:latin typeface="Pretendard Bold"/>
+              </a:rPr>
+              <a:t/>
+            </a:r>
+          </a:p>
+        </p:txBody>
+      </p:sp>
+      <p:sp>
+        <p:nvSpPr>
+          <p:cNvPr id="20" name="TextBox 20"/>
+          <p:cNvSpPr txBox="1"/>
+          <p:nvPr/>
+        </p:nvSpPr>
+        <p:spPr>
+          <a:xfrm>
+            <a:off x="10363200" y="4826000"/>
+            <a:ext cx="3200400" cy="495300"/>
+          </a:xfrm>
+          <a:prstGeom prst="rect">
+            <a:avLst/>
+          </a:prstGeom>
+        </p:spPr>
+        <p:txBody>
+          <a:bodyPr lIns="0" tIns="0" rIns="0" bIns="0" rtlCol="0" anchor="t">
+            <a:noAutofit/>
+          </a:bodyPr>
+          <a:lstStyle/>
+          <a:p>
+            <a:pPr lvl="0" algn="ctr">
+              <a:lnSpc>
+                <a:spcPct val="99600"/>
+              </a:lnSpc>
+            </a:pPr>
+            <a:r>
+              <a:rPr lang="ko-KR" sz="2800" b="0" i="0" u="none" strike="noStrike">
+                <a:solidFill>
+                  <a:srgbClr val="FFFFFF"/>
+                </a:solidFill>
+                <a:ea typeface="Pretendard Bold"/>
+              </a:rPr>
+              <a:t/>
+            </a:r>
+          </a:p>
+        </p:txBody>
+      </p:sp>
+      <p:sp>
+        <p:nvSpPr>
+          <p:cNvPr id="21" name="TextBox 21"/>
+          <p:cNvSpPr txBox="1"/>
+          <p:nvPr/>
+        </p:nvSpPr>
+        <p:spPr>
+          <a:xfrm>
+            <a:off x="14084300" y="2921000"/>
+            <a:ext cx="2819400" cy="812800"/>
+          </a:xfrm>
+          <a:prstGeom prst="rect">
+            <a:avLst/>
+          </a:prstGeom>
+        </p:spPr>
+        <p:txBody>
+          <a:bodyPr lIns="0" tIns="0" rIns="0" bIns="0" rtlCol="0" anchor="t">
+            <a:noAutofit/>
+          </a:bodyPr>
+          <a:lstStyle/>
+          <a:p>
+            <a:pPr lvl="0" algn="ctr">
+              <a:lnSpc>
+                <a:spcPct val="132800"/>
+              </a:lnSpc>
+            </a:pPr>
+            <a:r>
+              <a:rPr lang="en-US" sz="4600" b="0" i="0" u="none" strike="noStrike">
+                <a:solidFill>
+                  <a:srgbClr val="207CD7"/>
+                </a:solidFill>
+                <a:latin typeface="Pretendard Bold"/>
+              </a:rPr>
+              <a:t/>
+            </a:r>
+          </a:p>
+        </p:txBody>
+      </p:sp>
+      <p:sp>
+        <p:nvSpPr>
+          <p:cNvPr id="22" name="TextBox 22"/>
+          <p:cNvSpPr txBox="1"/>
+          <p:nvPr/>
+        </p:nvSpPr>
+        <p:spPr>
+          <a:xfrm>
+            <a:off x="14109700" y="2527300"/>
+            <a:ext cx="2768600" cy="393700"/>
+          </a:xfrm>
+          <a:prstGeom prst="rect">
+            <a:avLst/>
+          </a:prstGeom>
+        </p:spPr>
+        <p:txBody>
+          <a:bodyPr lIns="0" tIns="0" rIns="0" bIns="0" rtlCol="0" anchor="t">
+            <a:noAutofit/>
+          </a:bodyPr>
+          <a:lstStyle/>
+          <a:p>
+            <a:pPr lvl="0" algn="ctr">
+              <a:lnSpc>
+                <a:spcPct val="132800"/>
+              </a:lnSpc>
+            </a:pPr>
+            <a:r>
+              <a:rPr lang="ko-KR" sz="1713" b="0" i="0" u="none" strike="noStrike">
+                <a:solidFill>
+                  <a:srgbClr val="2C2C2C"/>
+                </a:solidFill>
+                <a:ea typeface="Pretendard Bold"/>
+              </a:rPr>
+              <a:t>GitHub</a:t>
+            </a:r>
+          </a:p>
+        </p:txBody>
+      </p:sp>
+      <p:sp>
+        <p:nvSpPr>
+          <p:cNvPr id="23" name="TextBox 23"/>
+          <p:cNvSpPr txBox="1"/>
+          <p:nvPr/>
+        </p:nvSpPr>
+        <p:spPr>
+          <a:xfrm>
+            <a:off x="10553700" y="2921000"/>
+            <a:ext cx="2819400" cy="812800"/>
+          </a:xfrm>
+          <a:prstGeom prst="rect">
+            <a:avLst/>
+          </a:prstGeom>
+        </p:spPr>
+        <p:txBody>
+          <a:bodyPr lIns="0" tIns="0" rIns="0" bIns="0" rtlCol="0" anchor="t">
+            <a:noAutofit/>
+          </a:bodyPr>
+          <a:lstStyle/>
+          <a:p>
+            <a:pPr lvl="0" algn="ctr">
+              <a:lnSpc>
+                <a:spcPct val="132800"/>
+              </a:lnSpc>
+            </a:pPr>
+            <a:r>
+              <a:rPr lang="en-US" sz="4600" b="0" i="0" u="none" strike="noStrike">
+                <a:solidFill>
+                  <a:srgbClr val="207CD7"/>
+                </a:solidFill>
+                <a:latin typeface="Pretendard Bold"/>
+              </a:rPr>
+              <a:t/>
+            </a:r>
+          </a:p>
+        </p:txBody>
+      </p:sp>
+      <p:sp>
+        <p:nvSpPr>
+          <p:cNvPr id="24" name="TextBox 24"/>
+          <p:cNvSpPr txBox="1"/>
+          <p:nvPr/>
+        </p:nvSpPr>
+        <p:spPr>
+          <a:xfrm>
+            <a:off x="10579100" y="2527300"/>
+            <a:ext cx="2768600" cy="393700"/>
+          </a:xfrm>
+          <a:prstGeom prst="rect">
+            <a:avLst/>
+          </a:prstGeom>
+        </p:spPr>
+        <p:txBody>
+          <a:bodyPr lIns="0" tIns="0" rIns="0" bIns="0" rtlCol="0" anchor="t">
+            <a:noAutofit/>
+          </a:bodyPr>
+          <a:lstStyle/>
+          <a:p>
+            <a:pPr lvl="0" algn="ctr">
+              <a:lnSpc>
+                <a:spcPct val="132800"/>
+              </a:lnSpc>
+            </a:pPr>
+            <a:r>
+              <a:rPr lang="ko-KR" sz="1713" b="0" i="0" u="none" strike="noStrike">
+                <a:solidFill>
+                  <a:srgbClr val="2C2C2C"/>
+                </a:solidFill>
+                <a:ea typeface="Pretendard Bold"/>
+              </a:rPr>
+              <a:t>wooxx3377@gachon.ac.kr</a:t>
+            </a:r>
+          </a:p>
+        </p:txBody>
+      </p:sp>
+      <p:sp>
+        <p:nvSpPr>
+          <p:cNvPr id="25" name="TextBox 25"/>
+          <p:cNvSpPr txBox="1"/>
+          <p:nvPr/>
+        </p:nvSpPr>
+        <p:spPr>
+          <a:xfrm>
+            <a:off x="7010400" y="2921000"/>
+            <a:ext cx="2819400" cy="812800"/>
+          </a:xfrm>
+          <a:prstGeom prst="rect">
+            <a:avLst/>
+          </a:prstGeom>
+        </p:spPr>
+        <p:txBody>
+          <a:bodyPr lIns="0" tIns="0" rIns="0" bIns="0" rtlCol="0" anchor="t">
+            <a:noAutofit/>
+          </a:bodyPr>
+          <a:lstStyle/>
+          <a:p>
+            <a:pPr lvl="0" algn="ctr">
+              <a:lnSpc>
+                <a:spcPct val="132800"/>
+              </a:lnSpc>
+            </a:pPr>
+            <a:r>
+              <a:rPr lang="en-US" sz="2172" b="0" i="0" u="none" strike="noStrike">
+                <a:solidFill>
+                  <a:srgbClr val="207CD7"/>
+                </a:solidFill>
+                <a:latin typeface="Pretendard Bold"/>
+              </a:rPr>
+              <a:t>github.com/yushin55</a:t>
+            </a:r>
+          </a:p>
+        </p:txBody>
+      </p:sp>
+      <p:sp>
+        <p:nvSpPr>
+          <p:cNvPr id="26" name="TextBox 26"/>
+          <p:cNvSpPr txBox="1"/>
+          <p:nvPr/>
+        </p:nvSpPr>
+        <p:spPr>
+          <a:xfrm>
+            <a:off x="7035800" y="2527300"/>
+            <a:ext cx="2768600" cy="393700"/>
+          </a:xfrm>
+          <a:prstGeom prst="rect">
+            <a:avLst/>
+          </a:prstGeom>
+        </p:spPr>
+        <p:txBody>
+          <a:bodyPr lIns="0" tIns="0" rIns="0" bIns="0" rtlCol="0" anchor="t">
+            <a:noAutofit/>
+          </a:bodyPr>
+          <a:lstStyle/>
+          <a:p>
+            <a:pPr lvl="0" algn="ctr">
+              <a:lnSpc>
+                <a:spcPct val="132800"/>
+              </a:lnSpc>
+            </a:pPr>
+            <a:r>
+              <a:rPr lang="ko-KR" sz="1713" b="0" i="0" u="none" strike="noStrike">
+                <a:solidFill>
+                  <a:srgbClr val="2C2C2C"/>
+                </a:solidFill>
+                <a:ea typeface="Pretendard Bold"/>
+              </a:rPr>
+              <a:t>이메일</a:t>
+            </a:r>
+          </a:p>
+        </p:txBody>
+      </p:sp>
+      <p:sp>
+        <p:nvSpPr>
+          <p:cNvPr id="27" name="TextBox 27"/>
+          <p:cNvSpPr txBox="1"/>
+          <p:nvPr/>
+        </p:nvSpPr>
+        <p:spPr>
+          <a:xfrm>
+            <a:off x="10363200" y="1231900"/>
+            <a:ext cx="3200400" cy="495300"/>
+          </a:xfrm>
+          <a:prstGeom prst="rect">
+            <a:avLst/>
+          </a:prstGeom>
+        </p:spPr>
+        <p:txBody>
+          <a:bodyPr lIns="0" tIns="0" rIns="0" bIns="0" rtlCol="0" anchor="t">
+            <a:noAutofit/>
+          </a:bodyPr>
+          <a:lstStyle/>
+          <a:p>
+            <a:pPr lvl="0" algn="ctr">
+              <a:lnSpc>
+                <a:spcPct val="99600"/>
+              </a:lnSpc>
+            </a:pPr>
+            <a:r>
+              <a:rPr lang="ko-KR" sz="2370" b="0" i="0" u="none" strike="noStrike">
+                <a:solidFill>
+                  <a:srgbClr val="FFFFFF"/>
+                </a:solidFill>
+                <a:ea typeface="Pretendard Bold"/>
+              </a:rPr>
+              <a:t>김유신</a:t>
+            </a:r>
+          </a:p>
+        </p:txBody>
+      </p:sp>
+      <p:sp>
+        <p:nvSpPr>
+          <p:cNvPr id="28" name="TextBox 28"/>
+          <p:cNvSpPr txBox="1"/>
+          <p:nvPr/>
+        </p:nvSpPr>
+        <p:spPr>
+          <a:xfrm>
+            <a:off x="1524000" y="4013200"/>
+            <a:ext cx="3416300" cy="1168400"/>
+          </a:xfrm>
+          <a:prstGeom prst="rect">
+            <a:avLst/>
+          </a:prstGeom>
+        </p:spPr>
+        <p:txBody>
+          <a:bodyPr lIns="0" tIns="0" rIns="0" bIns="0" rtlCol="0" anchor="t">
+            <a:noAutofit/>
+          </a:bodyPr>
+          <a:lstStyle/>
+          <a:p>
+            <a:pPr lvl="0" algn="l">
+              <a:lnSpc>
+                <a:spcPct val="132800"/>
+              </a:lnSpc>
+            </a:pPr>
+            <a:r>
+              <a:rPr lang="ko-KR" sz="2000" b="0" i="0" u="none" strike="noStrike">
+                <a:solidFill>
+                  <a:srgbClr val="2C2C2C"/>
+                </a:solidFill>
+                <a:ea typeface="Pretendard Regular"/>
+              </a:rPr>
+              <a:t/>
+            </a:r>
+          </a:p>
+        </p:txBody>
+      </p:sp>
+      <p:sp>
+        <p:nvSpPr>
+          <p:cNvPr id="29" name="TextBox 29"/>
+          <p:cNvSpPr txBox="1"/>
+          <p:nvPr/>
+        </p:nvSpPr>
+        <p:spPr>
+          <a:xfrm>
+            <a:off x="1574800" y="2933700"/>
+            <a:ext cx="3619500" cy="355600"/>
+          </a:xfrm>
+          <a:prstGeom prst="rect">
+            <a:avLst/>
+          </a:prstGeom>
+        </p:spPr>
+        <p:txBody>
+          <a:bodyPr lIns="0" tIns="0" rIns="0" bIns="0" rtlCol="0" anchor="t">
+            <a:noAutofit/>
+          </a:bodyPr>
+          <a:lstStyle/>
+          <a:p>
+            <a:pPr lvl="0" algn="l">
+              <a:lnSpc>
+                <a:spcPct val="99600"/>
+              </a:lnSpc>
+            </a:pPr>
+            <a:r>
+              <a:rPr lang="en-US" sz="2000" b="0" i="0" u="none" strike="noStrike">
+                <a:solidFill>
+                  <a:srgbClr val="207CD7"/>
+                </a:solidFill>
+                <a:latin typeface="Pretendard Bold"/>
+              </a:rPr>
+              <a:t/>
+            </a:r>
+          </a:p>
+        </p:txBody>
+      </p:sp>
+      <p:sp>
+        <p:nvSpPr>
+          <p:cNvPr id="30" name="TextBox 30"/>
+          <p:cNvSpPr txBox="1"/>
+          <p:nvPr/>
+        </p:nvSpPr>
+        <p:spPr>
+          <a:xfrm>
+            <a:off x="534126" y="927826"/>
+            <a:ext cx="4711699" cy="1981200"/>
+          </a:xfrm>
+          <a:prstGeom prst="rect">
+            <a:avLst/>
+          </a:prstGeom>
+        </p:spPr>
+        <p:txBody>
+          <a:bodyPr lIns="0" tIns="0" rIns="0" bIns="0" rtlCol="0" anchor="t">
+            <a:noAutofit/>
+          </a:bodyPr>
+          <a:lstStyle/>
+          <a:p>
+            <a:pPr lvl="0" algn="l">
+              <a:lnSpc>
+                <a:spcPct val="99600"/>
+              </a:lnSpc>
+            </a:pPr>
+            <a:r>
+              <a:rPr lang="en-US" sz="6000" b="0" i="0" u="none" strike="noStrike" dirty="0">
+                <a:solidFill>
+                  <a:srgbClr val="2C2C2C"/>
+                </a:solidFill>
+                <a:latin typeface="Pretendard ExtraBold"/>
+              </a:rPr>
+              <a:t>연락처</a:t>
+            </a:r>
+            <a:endParaRPr lang="ko-KR" sz="6000" b="0" i="0" u="none" strike="noStrike" dirty="0">
+              <a:solidFill>
+                <a:srgbClr val="2C2C2C"/>
+              </a:solidFill>
+              <a:ea typeface="Pretendard ExtraBold"/>
             </a:endParaRPr>
           </a:p>
         </p:txBody>
@@ -3930,30 +5346,6 @@
       </p:pic>
       <p:pic>
         <p:nvPicPr>
-          <p:cNvPr id="16" name="Picture 16"/>
-          <p:cNvPicPr>
-            <a:picLocks noChangeAspect="1"/>
-          </p:cNvPicPr>
-          <p:nvPr/>
-        </p:nvPicPr>
-        <p:blipFill>
-          <a:blip r:embed="rId7"/>
-          <a:stretch>
-            <a:fillRect/>
-          </a:stretch>
-        </p:blipFill>
-        <p:spPr>
-          <a:xfrm>
-            <a:off x="1513303" y="5842000"/>
-            <a:ext cx="2726491" cy="2159000"/>
-          </a:xfrm>
-          <a:prstGeom prst="rect">
-            <a:avLst/>
-          </a:prstGeom>
-        </p:spPr>
-      </p:pic>
-      <p:pic>
-        <p:nvPicPr>
           <p:cNvPr id="17" name="Picture 17"/>
           <p:cNvPicPr>
             <a:picLocks noChangeAspect="1"/>
@@ -4606,78 +5998,6 @@
       </p:pic>
       <p:pic>
         <p:nvPicPr>
-          <p:cNvPr id="5" name="Picture 5"/>
-          <p:cNvPicPr>
-            <a:picLocks noChangeAspect="1"/>
-          </p:cNvPicPr>
-          <p:nvPr/>
-        </p:nvPicPr>
-        <p:blipFill>
-          <a:blip r:embed="rId4"/>
-          <a:stretch>
-            <a:fillRect/>
-          </a:stretch>
-        </p:blipFill>
-        <p:spPr>
-          <a:xfrm>
-            <a:off x="6934200" y="6731000"/>
-            <a:ext cx="10045700" cy="2413000"/>
-          </a:xfrm>
-          <a:prstGeom prst="rect">
-            <a:avLst/>
-          </a:prstGeom>
-        </p:spPr>
-      </p:pic>
-      <p:pic>
-        <p:nvPicPr>
-          <p:cNvPr id="6" name="Picture 6"/>
-          <p:cNvPicPr>
-            <a:picLocks noChangeAspect="1"/>
-          </p:cNvPicPr>
-          <p:nvPr/>
-        </p:nvPicPr>
-        <p:blipFill>
-          <a:blip r:embed="rId4"/>
-          <a:stretch>
-            <a:fillRect/>
-          </a:stretch>
-        </p:blipFill>
-        <p:spPr>
-          <a:xfrm>
-            <a:off x="6934200" y="3937000"/>
-            <a:ext cx="10045700" cy="2413000"/>
-          </a:xfrm>
-          <a:prstGeom prst="rect">
-            <a:avLst/>
-          </a:prstGeom>
-        </p:spPr>
-      </p:pic>
-      <p:pic>
-        <p:nvPicPr>
-          <p:cNvPr id="7" name="Picture 7"/>
-          <p:cNvPicPr>
-            <a:picLocks noChangeAspect="1"/>
-          </p:cNvPicPr>
-          <p:nvPr/>
-        </p:nvPicPr>
-        <p:blipFill>
-          <a:blip r:embed="rId4"/>
-          <a:stretch>
-            <a:fillRect/>
-          </a:stretch>
-        </p:blipFill>
-        <p:spPr>
-          <a:xfrm>
-            <a:off x="6934200" y="1143000"/>
-            <a:ext cx="10045700" cy="2413000"/>
-          </a:xfrm>
-          <a:prstGeom prst="rect">
-            <a:avLst/>
-          </a:prstGeom>
-        </p:spPr>
-      </p:pic>
-      <p:pic>
-        <p:nvPicPr>
           <p:cNvPr id="8" name="Picture 8"/>
           <p:cNvPicPr>
             <a:picLocks noChangeAspect="1"/>
@@ -4834,7 +6154,7 @@
                 </a:solidFill>
                 <a:ea typeface="Pretendard Regular"/>
               </a:rPr>
-              <a:t>GitHub</a:t>
+              <a:t>코코네</a:t>
             </a:r>
           </a:p>
         </p:txBody>
@@ -4866,13 +6186,13 @@
               </a:lnSpc>
             </a:pPr>
             <a:r>
-              <a:rPr lang="ko-KR" sz="2370" b="0" i="0" u="none" strike="noStrike">
+              <a:rPr lang="ko-KR" sz="1562" b="0" i="0" u="none" strike="noStrike">
                 <a:solidFill>
                   <a:srgbClr val="2C2C2C"/>
                 </a:solidFill>
                 <a:ea typeface="Pretendard Bold"/>
               </a:rPr>
-              <a:t>기술 요약</a:t>
+              <a:t>github.com/yushin55</a:t>
             </a:r>
           </a:p>
         </p:txBody>
@@ -4904,13 +6224,13 @@
               </a:lnSpc>
             </a:pPr>
             <a:r>
-              <a:rPr lang="ko-KR" sz="900" b="0" i="0" u="none" strike="noStrike">
+              <a:rPr lang="ko-KR" sz="1290" b="0" i="0" u="none" strike="noStrike">
                 <a:solidFill>
                   <a:srgbClr val="9CB8D0"/>
                 </a:solidFill>
                 <a:ea typeface="Pretendard Bold"/>
               </a:rPr>
-              <a:t>github.com…</a:t>
+              <a:t>연락처</a:t>
             </a:r>
           </a:p>
         </p:txBody>
@@ -4947,13 +6267,13 @@
               <a:buChar char="●"/>
             </a:pPr>
             <a:r>
-              <a:rPr lang="ko-KR" sz="1635" b="0" i="0" u="none" strike="noStrike">
+              <a:rPr lang="ko-KR" sz="2100" b="0" i="0" u="none" strike="noStrike">
                 <a:solidFill>
                   <a:srgbClr val="2C2C2C"/>
                 </a:solidFill>
                 <a:ea typeface="Pretendard Regular"/>
               </a:rPr>
-              <a:t>성장 과정 문제 해결을 위한 집요함과 빠른 학습 능력을 바탕으로 성장해왔습니다. 사용자 피드백을 적극적으로 반영하여 서비스 개선에 기여하는 개발자가 되겠습니다.</a:t>
+              <a:t>프론트엔드 개발자</a:t>
             </a:r>
           </a:p>
         </p:txBody>
@@ -4985,13 +6305,13 @@
               </a:lnSpc>
             </a:pPr>
             <a:r>
-              <a:rPr lang="ko-KR" sz="1437" b="0" i="0" u="none" strike="noStrike">
+              <a:rPr lang="ko-KR" sz="2370" b="0" i="0" u="none" strike="noStrike">
                 <a:solidFill>
                   <a:srgbClr val="2C2C2C"/>
                 </a:solidFill>
                 <a:ea typeface="Pretendard Bold"/>
               </a:rPr>
-              <a:t>wooxx3377@gachon.ac.kr</a:t>
+              <a:t>성장</a:t>
             </a:r>
           </a:p>
         </p:txBody>
@@ -5029,7 +6349,7 @@
                 </a:solidFill>
                 <a:ea typeface="Pretendard Bold"/>
               </a:rPr>
-              <a:t>이메일</a:t>
+              <a:t>목표</a:t>
             </a:r>
           </a:p>
         </p:txBody>
@@ -5104,13 +6424,13 @@
               </a:lnSpc>
             </a:pPr>
             <a:r>
-              <a:rPr lang="ko-KR" sz="2800" b="0" i="0" u="none" strike="noStrike">
+              <a:rPr lang="ko-KR" sz="2370" b="0" i="0" u="none" strike="noStrike">
                 <a:solidFill>
                   <a:srgbClr val="2C2C2C"/>
                 </a:solidFill>
                 <a:ea typeface="Pretendard Bold"/>
               </a:rPr>
-              <a:t/>
+              <a:t>검증</a:t>
             </a:r>
           </a:p>
         </p:txBody>
@@ -5148,7 +6468,7 @@
                 </a:solidFill>
                 <a:ea typeface="Pretendard Bold"/>
               </a:rPr>
-              <a:t>가치관</a:t>
+              <a:t>가치</a:t>
             </a:r>
           </a:p>
         </p:txBody>
@@ -5180,13 +6500,13 @@
               </a:lnSpc>
             </a:pPr>
             <a:r>
-              <a:rPr lang="en-US" sz="1840" b="0" i="0" u="none" strike="noStrike">
+              <a:rPr lang="en-US" sz="2000" b="0" i="0" u="none" strike="noStrike">
                 <a:solidFill>
                   <a:srgbClr val="2C2C2C"/>
                 </a:solidFill>
                 <a:latin typeface="Pretendard Regular"/>
               </a:rPr>
-              <a:t>사용자 경험을 개선하고 기술적 한계를 극복하는 개발자가 되는 것을 목표로 합니다.</a:t>
+              <a:t/>
             </a:r>
           </a:p>
         </p:txBody>
@@ -5224,7 +6544,7 @@
                 </a:solidFill>
                 <a:latin typeface="Pretendard Bold"/>
               </a:rPr>
-              <a:t>목표</a:t>
+              <a:t>개선</a:t>
             </a:r>
           </a:p>
         </p:txBody>
@@ -5371,54 +6691,6 @@
       </p:pic>
       <p:pic>
         <p:nvPicPr>
-          <p:cNvPr id="5" name="Picture 5"/>
-          <p:cNvPicPr>
-            <a:picLocks noChangeAspect="1"/>
-          </p:cNvPicPr>
-          <p:nvPr/>
-        </p:nvPicPr>
-        <p:blipFill>
-          <a:blip r:embed="rId4"/>
-          <a:stretch>
-            <a:fillRect/>
-          </a:stretch>
-        </p:blipFill>
-        <p:spPr>
-          <a:xfrm>
-            <a:off x="12141200" y="4711700"/>
-            <a:ext cx="5080000" cy="4406900"/>
-          </a:xfrm>
-          <a:prstGeom prst="rect">
-            <a:avLst/>
-          </a:prstGeom>
-        </p:spPr>
-      </p:pic>
-      <p:pic>
-        <p:nvPicPr>
-          <p:cNvPr id="6" name="Picture 6"/>
-          <p:cNvPicPr>
-            <a:picLocks noChangeAspect="1"/>
-          </p:cNvPicPr>
-          <p:nvPr/>
-        </p:nvPicPr>
-        <p:blipFill>
-          <a:blip r:embed="rId5"/>
-          <a:stretch>
-            <a:fillRect/>
-          </a:stretch>
-        </p:blipFill>
-        <p:spPr>
-          <a:xfrm>
-            <a:off x="12382500" y="5041900"/>
-            <a:ext cx="4597400" cy="2247900"/>
-          </a:xfrm>
-          <a:prstGeom prst="rect">
-            <a:avLst/>
-          </a:prstGeom>
-        </p:spPr>
-      </p:pic>
-      <p:pic>
-        <p:nvPicPr>
           <p:cNvPr id="7" name="Picture 7"/>
           <p:cNvPicPr>
             <a:picLocks noChangeAspect="1"/>
@@ -5443,54 +6715,6 @@
       </p:pic>
       <p:pic>
         <p:nvPicPr>
-          <p:cNvPr id="8" name="Picture 8"/>
-          <p:cNvPicPr>
-            <a:picLocks noChangeAspect="1"/>
-          </p:cNvPicPr>
-          <p:nvPr/>
-        </p:nvPicPr>
-        <p:blipFill>
-          <a:blip r:embed="rId4"/>
-          <a:stretch>
-            <a:fillRect/>
-          </a:stretch>
-        </p:blipFill>
-        <p:spPr>
-          <a:xfrm>
-            <a:off x="6731000" y="4711700"/>
-            <a:ext cx="5080000" cy="4406900"/>
-          </a:xfrm>
-          <a:prstGeom prst="rect">
-            <a:avLst/>
-          </a:prstGeom>
-        </p:spPr>
-      </p:pic>
-      <p:pic>
-        <p:nvPicPr>
-          <p:cNvPr id="9" name="Picture 9"/>
-          <p:cNvPicPr>
-            <a:picLocks noChangeAspect="1"/>
-          </p:cNvPicPr>
-          <p:nvPr/>
-        </p:nvPicPr>
-        <p:blipFill>
-          <a:blip r:embed="rId5"/>
-          <a:stretch>
-            <a:fillRect/>
-          </a:stretch>
-        </p:blipFill>
-        <p:spPr>
-          <a:xfrm>
-            <a:off x="6985000" y="5041900"/>
-            <a:ext cx="4597400" cy="2247900"/>
-          </a:xfrm>
-          <a:prstGeom prst="rect">
-            <a:avLst/>
-          </a:prstGeom>
-        </p:spPr>
-      </p:pic>
-      <p:pic>
-        <p:nvPicPr>
           <p:cNvPr id="10" name="Picture 10"/>
           <p:cNvPicPr>
             <a:picLocks noChangeAspect="1"/>
@@ -5515,30 +6739,6 @@
       </p:pic>
       <p:pic>
         <p:nvPicPr>
-          <p:cNvPr id="11" name="Picture 11"/>
-          <p:cNvPicPr>
-            <a:picLocks noChangeAspect="1"/>
-          </p:cNvPicPr>
-          <p:nvPr/>
-        </p:nvPicPr>
-        <p:blipFill>
-          <a:blip r:embed="rId8"/>
-          <a:stretch>
-            <a:fillRect/>
-          </a:stretch>
-        </p:blipFill>
-        <p:spPr>
-          <a:xfrm>
-            <a:off x="6731000" y="1143000"/>
-            <a:ext cx="10490200" cy="2146300"/>
-          </a:xfrm>
-          <a:prstGeom prst="rect">
-            <a:avLst/>
-          </a:prstGeom>
-        </p:spPr>
-      </p:pic>
-      <p:pic>
-        <p:nvPicPr>
           <p:cNvPr id="12" name="Picture 12"/>
           <p:cNvPicPr>
             <a:picLocks noChangeAspect="1"/>
@@ -5666,7 +6866,7 @@
                 </a:solidFill>
                 <a:ea typeface="Pretendard Regular"/>
               </a:rPr>
-              <a:t/>
+              <a:t>테스트</a:t>
             </a:r>
           </a:p>
         </p:txBody>
@@ -5698,13 +6898,13 @@
               </a:lnSpc>
             </a:pPr>
             <a:r>
-              <a:rPr lang="ko-KR" sz="2370" b="0" i="0" u="none" strike="noStrike">
+              <a:rPr lang="ko-KR" sz="2800" b="0" i="0" u="none" strike="noStrike">
                 <a:solidFill>
                   <a:srgbClr val="FFFFFF"/>
                 </a:solidFill>
                 <a:ea typeface="Pretendard Bold"/>
               </a:rPr>
-              <a:t>협업</a:t>
+              <a:t/>
             </a:r>
           </a:p>
         </p:txBody>
@@ -5774,13 +6974,13 @@
               </a:lnSpc>
             </a:pPr>
             <a:r>
-              <a:rPr lang="ko-KR" sz="2800" b="0" i="0" u="none" strike="noStrike">
+              <a:rPr lang="ko-KR" sz="2370" b="0" i="0" u="none" strike="noStrike">
                 <a:solidFill>
                   <a:srgbClr val="FFFFFF"/>
                 </a:solidFill>
                 <a:ea typeface="Pretendard Bold"/>
               </a:rPr>
-              <a:t/>
+              <a:t>상태 관리</a:t>
             </a:r>
           </a:p>
         </p:txBody>
@@ -6008,7 +7208,7 @@
                 </a:solidFill>
                 <a:ea typeface="Pretendard Regular"/>
               </a:rPr>
-              <a:t/>
+              <a:t>협업 도구</a:t>
             </a:r>
           </a:p>
         </p:txBody>
@@ -6208,8 +7408,8 @@
         </p:blipFill>
         <p:spPr>
           <a:xfrm>
-            <a:off x="6731000" y="6591300"/>
-            <a:ext cx="10490200" cy="2679700"/>
+            <a:off x="6680200" y="8382000"/>
+            <a:ext cx="10490200" cy="863600"/>
           </a:xfrm>
           <a:prstGeom prst="rect">
             <a:avLst/>
@@ -6225,15 +7425,15 @@
           <p:nvPr/>
         </p:nvPicPr>
         <p:blipFill>
-          <a:blip r:embed="rId5"/>
+          <a:blip r:embed="rId4"/>
           <a:stretch>
             <a:fillRect/>
           </a:stretch>
         </p:blipFill>
         <p:spPr>
-          <a:xfrm rot="5400000">
-            <a:off x="10121900" y="8712200"/>
-            <a:ext cx="292100" cy="38100"/>
+          <a:xfrm>
+            <a:off x="6680200" y="7454900"/>
+            <a:ext cx="10490200" cy="863600"/>
           </a:xfrm>
           <a:prstGeom prst="rect">
             <a:avLst/>
@@ -6255,9 +7455,9 @@
           </a:stretch>
         </p:blipFill>
         <p:spPr>
-          <a:xfrm rot="5400000">
-            <a:off x="10121900" y="8204200"/>
-            <a:ext cx="292100" cy="38100"/>
+          <a:xfrm>
+            <a:off x="6680200" y="6527800"/>
+            <a:ext cx="10490200" cy="863600"/>
           </a:xfrm>
           <a:prstGeom prst="rect">
             <a:avLst/>
@@ -6279,9 +7479,9 @@
           </a:stretch>
         </p:blipFill>
         <p:spPr>
-          <a:xfrm rot="5400000">
-            <a:off x="10121900" y="7696200"/>
-            <a:ext cx="292100" cy="38100"/>
+          <a:xfrm>
+            <a:off x="6680200" y="5588000"/>
+            <a:ext cx="10490200" cy="863600"/>
           </a:xfrm>
           <a:prstGeom prst="rect">
             <a:avLst/>
@@ -6303,9 +7503,9 @@
           </a:stretch>
         </p:blipFill>
         <p:spPr>
-          <a:xfrm rot="5400000">
-            <a:off x="8788400" y="7912100"/>
-            <a:ext cx="1943100" cy="25400"/>
+          <a:xfrm>
+            <a:off x="6680200" y="4622800"/>
+            <a:ext cx="10490200" cy="863600"/>
           </a:xfrm>
           <a:prstGeom prst="rect">
             <a:avLst/>
@@ -6314,22 +7514,22 @@
       </p:pic>
       <p:pic>
         <p:nvPicPr>
-          <p:cNvPr id="10" name="Picture 10"/>
+          <p:cNvPr id="13" name="Picture 13"/>
           <p:cNvPicPr>
             <a:picLocks noChangeAspect="1"/>
           </p:cNvPicPr>
           <p:nvPr/>
         </p:nvPicPr>
         <p:blipFill>
-          <a:blip r:embed="rId7"/>
+          <a:blip r:embed="rId6"/>
           <a:stretch>
             <a:fillRect/>
           </a:stretch>
         </p:blipFill>
         <p:spPr>
           <a:xfrm>
-            <a:off x="6718300" y="2070100"/>
-            <a:ext cx="10426700" cy="4165600"/>
+            <a:off x="6731000" y="1028700"/>
+            <a:ext cx="10490200" cy="863600"/>
           </a:xfrm>
           <a:prstGeom prst="rect">
             <a:avLst/>
@@ -6338,7 +7538,7 @@
       </p:pic>
       <p:pic>
         <p:nvPicPr>
-          <p:cNvPr id="11" name="Picture 11"/>
+          <p:cNvPr id="14" name="Picture 14"/>
           <p:cNvPicPr>
             <a:picLocks noChangeAspect="1"/>
           </p:cNvPicPr>
@@ -6351,9 +7551,9 @@
           </a:stretch>
         </p:blipFill>
         <p:spPr>
-          <a:xfrm>
-            <a:off x="6731000" y="1092200"/>
-            <a:ext cx="10490200" cy="838200"/>
+          <a:xfrm rot="5400000">
+            <a:off x="838200" y="5130800"/>
+            <a:ext cx="9525000" cy="25400"/>
           </a:xfrm>
           <a:prstGeom prst="rect">
             <a:avLst/>
@@ -6362,7 +7562,7 @@
       </p:pic>
       <p:pic>
         <p:nvPicPr>
-          <p:cNvPr id="12" name="Picture 12"/>
+          <p:cNvPr id="15" name="Picture 15"/>
           <p:cNvPicPr>
             <a:picLocks noChangeAspect="1"/>
           </p:cNvPicPr>
@@ -6375,30 +7575,6 @@
           </a:stretch>
         </p:blipFill>
         <p:spPr>
-          <a:xfrm rot="5400000">
-            <a:off x="838200" y="5130800"/>
-            <a:ext cx="9525000" cy="25400"/>
-          </a:xfrm>
-          <a:prstGeom prst="rect">
-            <a:avLst/>
-          </a:prstGeom>
-        </p:spPr>
-      </p:pic>
-      <p:pic>
-        <p:nvPicPr>
-          <p:cNvPr id="13" name="Picture 13"/>
-          <p:cNvPicPr>
-            <a:picLocks noChangeAspect="1"/>
-          </p:cNvPicPr>
-          <p:nvPr/>
-        </p:nvPicPr>
-        <p:blipFill>
-          <a:blip r:embed="rId10"/>
-          <a:stretch>
-            <a:fillRect/>
-          </a:stretch>
-        </p:blipFill>
-        <p:spPr>
           <a:xfrm>
             <a:off x="1574800" y="3797300"/>
             <a:ext cx="381000" cy="50800"/>
@@ -6410,14 +7586,470 @@
       </p:pic>
       <p:sp>
         <p:nvSpPr>
-          <p:cNvPr id="14" name="TextBox 14"/>
-          <p:cNvSpPr txBox="1"/>
-          <p:nvPr/>
-        </p:nvSpPr>
-        <p:spPr>
-          <a:xfrm>
-            <a:off x="11252200" y="8559800"/>
-            <a:ext cx="4965700" cy="355600"/>
+          <p:cNvPr id="16" name="TextBox 16"/>
+          <p:cNvSpPr txBox="1"/>
+          <p:nvPr/>
+        </p:nvSpPr>
+        <p:spPr>
+          <a:xfrm>
+            <a:off x="10325100" y="8585200"/>
+            <a:ext cx="3200400" cy="495300"/>
+          </a:xfrm>
+          <a:prstGeom prst="rect">
+            <a:avLst/>
+          </a:prstGeom>
+        </p:spPr>
+        <p:txBody>
+          <a:bodyPr lIns="0" tIns="0" rIns="0" bIns="0" rtlCol="0" anchor="t">
+            <a:noAutofit/>
+          </a:bodyPr>
+          <a:lstStyle/>
+          <a:p>
+            <a:pPr lvl="0" algn="ctr">
+              <a:lnSpc>
+                <a:spcPct val="99600"/>
+              </a:lnSpc>
+            </a:pPr>
+            <a:r>
+              <a:rPr lang="en-US" sz="2370" b="0" i="0" u="none" strike="noStrike">
+                <a:solidFill>
+                  <a:srgbClr val="2C2C2C"/>
+                </a:solidFill>
+                <a:latin typeface="Pretendard Bold"/>
+              </a:rPr>
+              <a:t>효율</a:t>
+            </a:r>
+          </a:p>
+        </p:txBody>
+      </p:sp>
+      <p:sp>
+        <p:nvSpPr>
+          <p:cNvPr id="17" name="TextBox 17"/>
+          <p:cNvSpPr txBox="1"/>
+          <p:nvPr/>
+        </p:nvSpPr>
+        <p:spPr>
+          <a:xfrm>
+            <a:off x="10325100" y="7645400"/>
+            <a:ext cx="3200400" cy="495300"/>
+          </a:xfrm>
+          <a:prstGeom prst="rect">
+            <a:avLst/>
+          </a:prstGeom>
+        </p:spPr>
+        <p:txBody>
+          <a:bodyPr lIns="0" tIns="0" rIns="0" bIns="0" rtlCol="0" anchor="t">
+            <a:noAutofit/>
+          </a:bodyPr>
+          <a:lstStyle/>
+          <a:p>
+            <a:pPr lvl="0" algn="ctr">
+              <a:lnSpc>
+                <a:spcPct val="99600"/>
+              </a:lnSpc>
+            </a:pPr>
+            <a:r>
+              <a:rPr lang="en-US" sz="2370" b="0" i="0" u="none" strike="noStrike">
+                <a:solidFill>
+                  <a:srgbClr val="2C2C2C"/>
+                </a:solidFill>
+                <a:latin typeface="Pretendard Bold"/>
+              </a:rPr>
+              <a:t>결과</a:t>
+            </a:r>
+          </a:p>
+        </p:txBody>
+      </p:sp>
+      <p:sp>
+        <p:nvSpPr>
+          <p:cNvPr id="18" name="TextBox 18"/>
+          <p:cNvSpPr txBox="1"/>
+          <p:nvPr/>
+        </p:nvSpPr>
+        <p:spPr>
+          <a:xfrm>
+            <a:off x="10325100" y="6718300"/>
+            <a:ext cx="3200400" cy="495300"/>
+          </a:xfrm>
+          <a:prstGeom prst="rect">
+            <a:avLst/>
+          </a:prstGeom>
+        </p:spPr>
+        <p:txBody>
+          <a:bodyPr lIns="0" tIns="0" rIns="0" bIns="0" rtlCol="0" anchor="t">
+            <a:noAutofit/>
+          </a:bodyPr>
+          <a:lstStyle/>
+          <a:p>
+            <a:pPr lvl="0" algn="ctr">
+              <a:lnSpc>
+                <a:spcPct val="99600"/>
+              </a:lnSpc>
+            </a:pPr>
+            <a:r>
+              <a:rPr lang="en-US" sz="2370" b="0" i="0" u="none" strike="noStrike">
+                <a:solidFill>
+                  <a:srgbClr val="2C2C2C"/>
+                </a:solidFill>
+                <a:latin typeface="Pretendard Bold"/>
+              </a:rPr>
+              <a:t>시간 단축</a:t>
+            </a:r>
+          </a:p>
+        </p:txBody>
+      </p:sp>
+      <p:sp>
+        <p:nvSpPr>
+          <p:cNvPr id="19" name="TextBox 19"/>
+          <p:cNvSpPr txBox="1"/>
+          <p:nvPr/>
+        </p:nvSpPr>
+        <p:spPr>
+          <a:xfrm>
+            <a:off x="10325100" y="5791200"/>
+            <a:ext cx="3200400" cy="495300"/>
+          </a:xfrm>
+          <a:prstGeom prst="rect">
+            <a:avLst/>
+          </a:prstGeom>
+        </p:spPr>
+        <p:txBody>
+          <a:bodyPr lIns="0" tIns="0" rIns="0" bIns="0" rtlCol="0" anchor="t">
+            <a:noAutofit/>
+          </a:bodyPr>
+          <a:lstStyle/>
+          <a:p>
+            <a:pPr lvl="0" algn="ctr">
+              <a:lnSpc>
+                <a:spcPct val="99600"/>
+              </a:lnSpc>
+            </a:pPr>
+            <a:r>
+              <a:rPr lang="en-US" sz="2800" b="0" i="0" u="none" strike="noStrike">
+                <a:solidFill>
+                  <a:srgbClr val="2C2C2C"/>
+                </a:solidFill>
+                <a:latin typeface="Pretendard Bold"/>
+              </a:rPr>
+              <a:t/>
+            </a:r>
+          </a:p>
+        </p:txBody>
+      </p:sp>
+      <p:sp>
+        <p:nvSpPr>
+          <p:cNvPr id="20" name="TextBox 20"/>
+          <p:cNvSpPr txBox="1"/>
+          <p:nvPr/>
+        </p:nvSpPr>
+        <p:spPr>
+          <a:xfrm>
+            <a:off x="10363200" y="4826000"/>
+            <a:ext cx="3200400" cy="495300"/>
+          </a:xfrm>
+          <a:prstGeom prst="rect">
+            <a:avLst/>
+          </a:prstGeom>
+        </p:spPr>
+        <p:txBody>
+          <a:bodyPr lIns="0" tIns="0" rIns="0" bIns="0" rtlCol="0" anchor="t">
+            <a:noAutofit/>
+          </a:bodyPr>
+          <a:lstStyle/>
+          <a:p>
+            <a:pPr lvl="0" algn="ctr">
+              <a:lnSpc>
+                <a:spcPct val="99600"/>
+              </a:lnSpc>
+            </a:pPr>
+            <a:r>
+              <a:rPr lang="ko-KR" sz="2370" b="0" i="0" u="none" strike="noStrike">
+                <a:solidFill>
+                  <a:srgbClr val="FFFFFF"/>
+                </a:solidFill>
+                <a:ea typeface="Pretendard Bold"/>
+              </a:rPr>
+              <a:t>기능</a:t>
+            </a:r>
+          </a:p>
+        </p:txBody>
+      </p:sp>
+      <p:sp>
+        <p:nvSpPr>
+          <p:cNvPr id="21" name="TextBox 21"/>
+          <p:cNvSpPr txBox="1"/>
+          <p:nvPr/>
+        </p:nvSpPr>
+        <p:spPr>
+          <a:xfrm>
+            <a:off x="14084300" y="2921000"/>
+            <a:ext cx="2819400" cy="812800"/>
+          </a:xfrm>
+          <a:prstGeom prst="rect">
+            <a:avLst/>
+          </a:prstGeom>
+        </p:spPr>
+        <p:txBody>
+          <a:bodyPr lIns="0" tIns="0" rIns="0" bIns="0" rtlCol="0" anchor="t">
+            <a:noAutofit/>
+          </a:bodyPr>
+          <a:lstStyle/>
+          <a:p>
+            <a:pPr lvl="0" algn="ctr">
+              <a:lnSpc>
+                <a:spcPct val="132800"/>
+              </a:lnSpc>
+            </a:pPr>
+            <a:r>
+              <a:rPr lang="en-US" sz="4232" b="0" i="0" u="none" strike="noStrike">
+                <a:solidFill>
+                  <a:srgbClr val="207CD7"/>
+                </a:solidFill>
+                <a:latin typeface="Pretendard Bold"/>
+              </a:rPr>
+              <a:t>자동 변환</a:t>
+            </a:r>
+          </a:p>
+        </p:txBody>
+      </p:sp>
+      <p:sp>
+        <p:nvSpPr>
+          <p:cNvPr id="22" name="TextBox 22"/>
+          <p:cNvSpPr txBox="1"/>
+          <p:nvPr/>
+        </p:nvSpPr>
+        <p:spPr>
+          <a:xfrm>
+            <a:off x="14109700" y="2527300"/>
+            <a:ext cx="2768600" cy="393700"/>
+          </a:xfrm>
+          <a:prstGeom prst="rect">
+            <a:avLst/>
+          </a:prstGeom>
+        </p:spPr>
+        <p:txBody>
+          <a:bodyPr lIns="0" tIns="0" rIns="0" bIns="0" rtlCol="0" anchor="t">
+            <a:noAutofit/>
+          </a:bodyPr>
+          <a:lstStyle/>
+          <a:p>
+            <a:pPr lvl="0" algn="ctr">
+              <a:lnSpc>
+                <a:spcPct val="132800"/>
+              </a:lnSpc>
+            </a:pPr>
+            <a:r>
+              <a:rPr lang="ko-KR" sz="1713" b="0" i="0" u="none" strike="noStrike">
+                <a:solidFill>
+                  <a:srgbClr val="2C2C2C"/>
+                </a:solidFill>
+                <a:ea typeface="Pretendard Bold"/>
+              </a:rPr>
+              <a:t>취업 준비생</a:t>
+            </a:r>
+          </a:p>
+        </p:txBody>
+      </p:sp>
+      <p:sp>
+        <p:nvSpPr>
+          <p:cNvPr id="23" name="TextBox 23"/>
+          <p:cNvSpPr txBox="1"/>
+          <p:nvPr/>
+        </p:nvSpPr>
+        <p:spPr>
+          <a:xfrm>
+            <a:off x="10553700" y="2921000"/>
+            <a:ext cx="2819400" cy="812800"/>
+          </a:xfrm>
+          <a:prstGeom prst="rect">
+            <a:avLst/>
+          </a:prstGeom>
+        </p:spPr>
+        <p:txBody>
+          <a:bodyPr lIns="0" tIns="0" rIns="0" bIns="0" rtlCol="0" anchor="t">
+            <a:noAutofit/>
+          </a:bodyPr>
+          <a:lstStyle/>
+          <a:p>
+            <a:pPr lvl="0" algn="ctr">
+              <a:lnSpc>
+                <a:spcPct val="132800"/>
+              </a:lnSpc>
+            </a:pPr>
+            <a:r>
+              <a:rPr lang="en-US" sz="4232" b="0" i="0" u="none" strike="noStrike">
+                <a:solidFill>
+                  <a:srgbClr val="207CD7"/>
+                </a:solidFill>
+                <a:latin typeface="Pretendard Bold"/>
+              </a:rPr>
+              <a:t>8시간</a:t>
+            </a:r>
+          </a:p>
+        </p:txBody>
+      </p:sp>
+      <p:sp>
+        <p:nvSpPr>
+          <p:cNvPr id="24" name="TextBox 24"/>
+          <p:cNvSpPr txBox="1"/>
+          <p:nvPr/>
+        </p:nvSpPr>
+        <p:spPr>
+          <a:xfrm>
+            <a:off x="10579100" y="2527300"/>
+            <a:ext cx="2768600" cy="393700"/>
+          </a:xfrm>
+          <a:prstGeom prst="rect">
+            <a:avLst/>
+          </a:prstGeom>
+        </p:spPr>
+        <p:txBody>
+          <a:bodyPr lIns="0" tIns="0" rIns="0" bIns="0" rtlCol="0" anchor="t">
+            <a:noAutofit/>
+          </a:bodyPr>
+          <a:lstStyle/>
+          <a:p>
+            <a:pPr lvl="0" algn="ctr">
+              <a:lnSpc>
+                <a:spcPct val="132800"/>
+              </a:lnSpc>
+            </a:pPr>
+            <a:r>
+              <a:rPr lang="ko-KR" sz="1713" b="0" i="0" u="none" strike="noStrike">
+                <a:solidFill>
+                  <a:srgbClr val="2C2C2C"/>
+                </a:solidFill>
+                <a:ea typeface="Pretendard Bold"/>
+              </a:rPr>
+              <a:t>React, Node.js</a:t>
+            </a:r>
+          </a:p>
+        </p:txBody>
+      </p:sp>
+      <p:sp>
+        <p:nvSpPr>
+          <p:cNvPr id="25" name="TextBox 25"/>
+          <p:cNvSpPr txBox="1"/>
+          <p:nvPr/>
+        </p:nvSpPr>
+        <p:spPr>
+          <a:xfrm>
+            <a:off x="7010400" y="2921000"/>
+            <a:ext cx="2819400" cy="812800"/>
+          </a:xfrm>
+          <a:prstGeom prst="rect">
+            <a:avLst/>
+          </a:prstGeom>
+        </p:spPr>
+        <p:txBody>
+          <a:bodyPr lIns="0" tIns="0" rIns="0" bIns="0" rtlCol="0" anchor="t">
+            <a:noAutofit/>
+          </a:bodyPr>
+          <a:lstStyle/>
+          <a:p>
+            <a:pPr lvl="0" algn="ctr">
+              <a:lnSpc>
+                <a:spcPct val="132800"/>
+              </a:lnSpc>
+            </a:pPr>
+            <a:r>
+              <a:rPr lang="en-US" sz="4232" b="0" i="0" u="none" strike="noStrike">
+                <a:solidFill>
+                  <a:srgbClr val="207CD7"/>
+                </a:solidFill>
+                <a:latin typeface="Pretendard Bold"/>
+              </a:rPr>
+              <a:t>PPT 변환</a:t>
+            </a:r>
+          </a:p>
+        </p:txBody>
+      </p:sp>
+      <p:sp>
+        <p:nvSpPr>
+          <p:cNvPr id="26" name="TextBox 26"/>
+          <p:cNvSpPr txBox="1"/>
+          <p:nvPr/>
+        </p:nvSpPr>
+        <p:spPr>
+          <a:xfrm>
+            <a:off x="7035800" y="2527300"/>
+            <a:ext cx="2768600" cy="393700"/>
+          </a:xfrm>
+          <a:prstGeom prst="rect">
+            <a:avLst/>
+          </a:prstGeom>
+        </p:spPr>
+        <p:txBody>
+          <a:bodyPr lIns="0" tIns="0" rIns="0" bIns="0" rtlCol="0" anchor="t">
+            <a:noAutofit/>
+          </a:bodyPr>
+          <a:lstStyle/>
+          <a:p>
+            <a:pPr lvl="0" algn="ctr">
+              <a:lnSpc>
+                <a:spcPct val="132800"/>
+              </a:lnSpc>
+            </a:pPr>
+            <a:r>
+              <a:rPr lang="ko-KR" sz="1713" b="0" i="0" u="none" strike="noStrike">
+                <a:solidFill>
+                  <a:srgbClr val="2C2C2C"/>
+                </a:solidFill>
+                <a:ea typeface="Pretendard Bold"/>
+              </a:rPr>
+              <a:t>2025.09 - 2026.02</a:t>
+            </a:r>
+          </a:p>
+        </p:txBody>
+      </p:sp>
+      <p:sp>
+        <p:nvSpPr>
+          <p:cNvPr id="27" name="TextBox 27"/>
+          <p:cNvSpPr txBox="1"/>
+          <p:nvPr/>
+        </p:nvSpPr>
+        <p:spPr>
+          <a:xfrm>
+            <a:off x="10363200" y="1231900"/>
+            <a:ext cx="3200400" cy="495300"/>
+          </a:xfrm>
+          <a:prstGeom prst="rect">
+            <a:avLst/>
+          </a:prstGeom>
+        </p:spPr>
+        <p:txBody>
+          <a:bodyPr lIns="0" tIns="0" rIns="0" bIns="0" rtlCol="0" anchor="t">
+            <a:noAutofit/>
+          </a:bodyPr>
+          <a:lstStyle/>
+          <a:p>
+            <a:pPr lvl="0" algn="ctr">
+              <a:lnSpc>
+                <a:spcPct val="99600"/>
+              </a:lnSpc>
+            </a:pPr>
+            <a:r>
+              <a:rPr lang="ko-KR" sz="2370" b="0" i="0" u="none" strike="noStrike">
+                <a:solidFill>
+                  <a:srgbClr val="FFFFFF"/>
+                </a:solidFill>
+                <a:ea typeface="Pretendard Bold"/>
+              </a:rPr>
+              <a:t>프론트엔드 리드</a:t>
+            </a:r>
+          </a:p>
+        </p:txBody>
+      </p:sp>
+      <p:sp>
+        <p:nvSpPr>
+          <p:cNvPr id="28" name="TextBox 28"/>
+          <p:cNvSpPr txBox="1"/>
+          <p:nvPr/>
+        </p:nvSpPr>
+        <p:spPr>
+          <a:xfrm>
+            <a:off x="1524000" y="4013200"/>
+            <a:ext cx="3416300" cy="1168400"/>
           </a:xfrm>
           <a:prstGeom prst="rect">
             <a:avLst/>
@@ -6435,27 +8067,27 @@
               </a:lnSpc>
             </a:pPr>
             <a:r>
-              <a:rPr lang="ko-KR" sz="1433" b="0" i="0" u="none" strike="noStrike">
+              <a:rPr lang="ko-KR" sz="2000" b="0" i="0" u="none" strike="noStrike">
                 <a:solidFill>
                   <a:srgbClr val="2C2C2C"/>
                 </a:solidFill>
                 <a:ea typeface="Pretendard Regular"/>
               </a:rPr>
-              <a:t>포트폴리오 변환 시간</a:t>
-            </a:r>
-          </a:p>
-        </p:txBody>
-      </p:sp>
-      <p:sp>
-        <p:nvSpPr>
-          <p:cNvPr id="15" name="TextBox 15"/>
-          <p:cNvSpPr txBox="1"/>
-          <p:nvPr/>
-        </p:nvSpPr>
-        <p:spPr>
-          <a:xfrm>
-            <a:off x="10439400" y="8559800"/>
-            <a:ext cx="749300" cy="355600"/>
+              <a:t>노션형 포트폴리오를 PPT로 자동 변환하여 포트폴리오 제작 시간을 단축합니다.</a:t>
+            </a:r>
+          </a:p>
+        </p:txBody>
+      </p:sp>
+      <p:sp>
+        <p:nvSpPr>
+          <p:cNvPr id="29" name="TextBox 29"/>
+          <p:cNvSpPr txBox="1"/>
+          <p:nvPr/>
+        </p:nvSpPr>
+        <p:spPr>
+          <a:xfrm>
+            <a:off x="1574800" y="2933700"/>
+            <a:ext cx="3619500" cy="355600"/>
           </a:xfrm>
           <a:prstGeom prst="rect">
             <a:avLst/>
@@ -6469,358 +8101,53 @@
           <a:p>
             <a:pPr lvl="0" algn="l">
               <a:lnSpc>
-                <a:spcPct val="116199"/>
-              </a:lnSpc>
-            </a:pPr>
-            <a:r>
-              <a:rPr lang="ko-KR" sz="900" b="0" i="0" u="none" strike="noStrike">
+                <a:spcPct val="99600"/>
+              </a:lnSpc>
+            </a:pPr>
+            <a:r>
+              <a:rPr lang="en-US" sz="944" b="0" i="0" u="none" strike="noStrike">
+                <a:solidFill>
+                  <a:srgbClr val="207CD7"/>
+                </a:solidFill>
+                <a:latin typeface="Pretendard Bold"/>
+              </a:rPr>
+              <a:t>PPT 제작 8시간 문제 발견, 노션 포트폴리오 자동 변환 기능 개발.</a:t>
+            </a:r>
+          </a:p>
+        </p:txBody>
+      </p:sp>
+      <p:sp>
+        <p:nvSpPr>
+          <p:cNvPr id="30" name="TextBox 30"/>
+          <p:cNvSpPr txBox="1"/>
+          <p:nvPr/>
+        </p:nvSpPr>
+        <p:spPr>
+          <a:xfrm>
+            <a:off x="534126" y="927826"/>
+            <a:ext cx="4711699" cy="1981200"/>
+          </a:xfrm>
+          <a:prstGeom prst="rect">
+            <a:avLst/>
+          </a:prstGeom>
+        </p:spPr>
+        <p:txBody>
+          <a:bodyPr lIns="0" tIns="0" rIns="0" bIns="0" rtlCol="0" anchor="t">
+            <a:noAutofit/>
+          </a:bodyPr>
+          <a:lstStyle/>
+          <a:p>
+            <a:pPr lvl="0" algn="l">
+              <a:lnSpc>
+                <a:spcPct val="99600"/>
+              </a:lnSpc>
+            </a:pPr>
+            <a:r>
+              <a:rPr lang="en-US" sz="4298" b="0" i="0" u="none" strike="noStrike" dirty="0">
                 <a:solidFill>
                   <a:srgbClr val="2C2C2C"/>
                 </a:solidFill>
-                <a:ea typeface="Pretendard Bold"/>
-              </a:rPr>
-              <a:t>주간 잘림 제보</a:t>
-            </a:r>
-          </a:p>
-        </p:txBody>
-      </p:sp>
-      <p:sp>
-        <p:nvSpPr>
-          <p:cNvPr id="16" name="TextBox 16"/>
-          <p:cNvSpPr txBox="1"/>
-          <p:nvPr/>
-        </p:nvSpPr>
-        <p:spPr>
-          <a:xfrm>
-            <a:off x="11252200" y="8051800"/>
-            <a:ext cx="4965700" cy="355600"/>
-          </a:xfrm>
-          <a:prstGeom prst="rect">
-            <a:avLst/>
-          </a:prstGeom>
-        </p:spPr>
-        <p:txBody>
-          <a:bodyPr lIns="0" tIns="0" rIns="0" bIns="0" rtlCol="0" anchor="t">
-            <a:noAutofit/>
-          </a:bodyPr>
-          <a:lstStyle/>
-          <a:p>
-            <a:pPr lvl="0" algn="l">
-              <a:lnSpc>
-                <a:spcPct val="132800"/>
-              </a:lnSpc>
-            </a:pPr>
-            <a:r>
-              <a:rPr lang="ko-KR" sz="1433" b="0" i="0" u="none" strike="noStrike">
-                <a:solidFill>
-                  <a:srgbClr val="2C2C2C"/>
-                </a:solidFill>
-                <a:ea typeface="Pretendard Regular"/>
-              </a:rPr>
-              <a:t>8시간 → 10분</a:t>
-            </a:r>
-          </a:p>
-        </p:txBody>
-      </p:sp>
-      <p:sp>
-        <p:nvSpPr>
-          <p:cNvPr id="17" name="TextBox 17"/>
-          <p:cNvSpPr txBox="1"/>
-          <p:nvPr/>
-        </p:nvSpPr>
-        <p:spPr>
-          <a:xfrm>
-            <a:off x="10439400" y="8051800"/>
-            <a:ext cx="749300" cy="355600"/>
-          </a:xfrm>
-          <a:prstGeom prst="rect">
-            <a:avLst/>
-          </a:prstGeom>
-        </p:spPr>
-        <p:txBody>
-          <a:bodyPr lIns="0" tIns="0" rIns="0" bIns="0" rtlCol="0" anchor="t">
-            <a:noAutofit/>
-          </a:bodyPr>
-          <a:lstStyle/>
-          <a:p>
-            <a:pPr lvl="0" algn="l">
-              <a:lnSpc>
-                <a:spcPct val="116199"/>
-              </a:lnSpc>
-            </a:pPr>
-            <a:r>
-              <a:rPr lang="ko-KR" sz="900" b="0" i="0" u="none" strike="noStrike">
-                <a:solidFill>
-                  <a:srgbClr val="2C2C2C"/>
-                </a:solidFill>
-                <a:ea typeface="Pretendard Bold"/>
-              </a:rPr>
-              <a:t>변환 시간 단축</a:t>
-            </a:r>
-          </a:p>
-        </p:txBody>
-      </p:sp>
-      <p:sp>
-        <p:nvSpPr>
-          <p:cNvPr id="18" name="TextBox 18"/>
-          <p:cNvSpPr txBox="1"/>
-          <p:nvPr/>
-        </p:nvSpPr>
-        <p:spPr>
-          <a:xfrm>
-            <a:off x="11252200" y="7543800"/>
-            <a:ext cx="4965700" cy="355600"/>
-          </a:xfrm>
-          <a:prstGeom prst="rect">
-            <a:avLst/>
-          </a:prstGeom>
-        </p:spPr>
-        <p:txBody>
-          <a:bodyPr lIns="0" tIns="0" rIns="0" bIns="0" rtlCol="0" anchor="t">
-            <a:noAutofit/>
-          </a:bodyPr>
-          <a:lstStyle/>
-          <a:p>
-            <a:pPr lvl="0" algn="l">
-              <a:lnSpc>
-                <a:spcPct val="132800"/>
-              </a:lnSpc>
-            </a:pPr>
-            <a:r>
-              <a:rPr lang="ko-KR" sz="1433" b="0" i="0" u="none" strike="noStrike">
-                <a:solidFill>
-                  <a:srgbClr val="2C2C2C"/>
-                </a:solidFill>
-                <a:ea typeface="Pretendard Regular"/>
-              </a:rPr>
-              <a:t>변환 품질 개선</a:t>
-            </a:r>
-          </a:p>
-        </p:txBody>
-      </p:sp>
-      <p:sp>
-        <p:nvSpPr>
-          <p:cNvPr id="19" name="TextBox 19"/>
-          <p:cNvSpPr txBox="1"/>
-          <p:nvPr/>
-        </p:nvSpPr>
-        <p:spPr>
-          <a:xfrm>
-            <a:off x="10439400" y="7556500"/>
-            <a:ext cx="749300" cy="355600"/>
-          </a:xfrm>
-          <a:prstGeom prst="rect">
-            <a:avLst/>
-          </a:prstGeom>
-        </p:spPr>
-        <p:txBody>
-          <a:bodyPr lIns="0" tIns="0" rIns="0" bIns="0" rtlCol="0" anchor="t">
-            <a:noAutofit/>
-          </a:bodyPr>
-          <a:lstStyle/>
-          <a:p>
-            <a:pPr lvl="0" algn="l">
-              <a:lnSpc>
-                <a:spcPct val="116199"/>
-              </a:lnSpc>
-            </a:pPr>
-            <a:r>
-              <a:rPr lang="ko-KR" sz="1026" b="0" i="0" u="none" strike="noStrike">
-                <a:solidFill>
-                  <a:srgbClr val="2C2C2C"/>
-                </a:solidFill>
-                <a:ea typeface="Pretendard Bold"/>
-              </a:rPr>
-              <a:t>12건 → 0건</a:t>
-            </a:r>
-          </a:p>
-        </p:txBody>
-      </p:sp>
-      <p:sp>
-        <p:nvSpPr>
-          <p:cNvPr id="20" name="TextBox 20"/>
-          <p:cNvSpPr txBox="1"/>
-          <p:nvPr/>
-        </p:nvSpPr>
-        <p:spPr>
-          <a:xfrm>
-            <a:off x="10248900" y="6959600"/>
-            <a:ext cx="5969000" cy="355600"/>
-          </a:xfrm>
-          <a:prstGeom prst="rect">
-            <a:avLst/>
-          </a:prstGeom>
-        </p:spPr>
-        <p:txBody>
-          <a:bodyPr lIns="0" tIns="0" rIns="0" bIns="0" rtlCol="0" anchor="t">
-            <a:noAutofit/>
-          </a:bodyPr>
-          <a:lstStyle/>
-          <a:p>
-            <a:pPr lvl="0" algn="l">
-              <a:lnSpc>
-                <a:spcPct val="132800"/>
-              </a:lnSpc>
-            </a:pPr>
-            <a:r>
-              <a:rPr lang="ko-KR" sz="1433" b="0" i="0" u="none" strike="noStrike">
-                <a:solidFill>
-                  <a:srgbClr val="2C2C2C"/>
-                </a:solidFill>
-                <a:ea typeface="Pretendard Regular"/>
-              </a:rPr>
-              <a:t>노션형 포트폴리오를 PPT로 자동 변환하는 서비스 개발</a:t>
-            </a:r>
-          </a:p>
-        </p:txBody>
-      </p:sp>
-      <p:sp>
-        <p:nvSpPr>
-          <p:cNvPr id="21" name="TextBox 21"/>
-          <p:cNvSpPr txBox="1"/>
-          <p:nvPr/>
-        </p:nvSpPr>
-        <p:spPr>
-          <a:xfrm>
-            <a:off x="7251700" y="6972300"/>
-            <a:ext cx="2133600" cy="495300"/>
-          </a:xfrm>
-          <a:prstGeom prst="rect">
-            <a:avLst/>
-          </a:prstGeom>
-        </p:spPr>
-        <p:txBody>
-          <a:bodyPr lIns="0" tIns="0" rIns="0" bIns="0" rtlCol="0" anchor="t">
-            <a:noAutofit/>
-          </a:bodyPr>
-          <a:lstStyle/>
-          <a:p>
-            <a:pPr lvl="0" algn="l">
-              <a:lnSpc>
-                <a:spcPct val="116199"/>
-              </a:lnSpc>
-            </a:pPr>
-            <a:r>
-              <a:rPr lang="ko-KR" sz="2180" b="0" i="0" u="none" strike="noStrike">
-                <a:solidFill>
-                  <a:srgbClr val="2C2C2C"/>
-                </a:solidFill>
-                <a:ea typeface="Pretendard Bold"/>
-              </a:rPr>
-              <a:t>React, Node.js</a:t>
-            </a:r>
-          </a:p>
-        </p:txBody>
-      </p:sp>
-      <p:sp>
-        <p:nvSpPr>
-          <p:cNvPr id="22" name="TextBox 22"/>
-          <p:cNvSpPr txBox="1"/>
-          <p:nvPr/>
-        </p:nvSpPr>
-        <p:spPr>
-          <a:xfrm>
-            <a:off x="10363200" y="1282700"/>
-            <a:ext cx="3200400" cy="495300"/>
-          </a:xfrm>
-          <a:prstGeom prst="rect">
-            <a:avLst/>
-          </a:prstGeom>
-        </p:spPr>
-        <p:txBody>
-          <a:bodyPr lIns="0" tIns="0" rIns="0" bIns="0" rtlCol="0" anchor="t">
-            <a:noAutofit/>
-          </a:bodyPr>
-          <a:lstStyle/>
-          <a:p>
-            <a:pPr lvl="0" algn="ctr">
-              <a:lnSpc>
-                <a:spcPct val="99600"/>
-              </a:lnSpc>
-            </a:pPr>
-            <a:r>
-              <a:rPr lang="en-US" sz="2370" b="0" i="0" u="none" strike="noStrike">
-                <a:solidFill>
-                  <a:srgbClr val="FFFFFF"/>
-                </a:solidFill>
-                <a:latin typeface="Pretendard Bold"/>
-              </a:rPr>
-              <a:t>프론트엔드 리드</a:t>
-            </a:r>
-          </a:p>
-        </p:txBody>
-      </p:sp>
-      <p:sp>
-        <p:nvSpPr>
-          <p:cNvPr id="23" name="TextBox 23"/>
-          <p:cNvSpPr txBox="1"/>
-          <p:nvPr/>
-        </p:nvSpPr>
-        <p:spPr>
-          <a:xfrm>
-            <a:off x="1524000" y="4013200"/>
-            <a:ext cx="3416300" cy="762000"/>
-          </a:xfrm>
-          <a:prstGeom prst="rect">
-            <a:avLst/>
-          </a:prstGeom>
-        </p:spPr>
-        <p:txBody>
-          <a:bodyPr lIns="0" tIns="0" rIns="0" bIns="0" rtlCol="0" anchor="t">
-            <a:noAutofit/>
-          </a:bodyPr>
-          <a:lstStyle/>
-          <a:p>
-            <a:pPr lvl="0" algn="l">
-              <a:lnSpc>
-                <a:spcPct val="132800"/>
-              </a:lnSpc>
-            </a:pPr>
-            <a:r>
-              <a:rPr lang="ko-KR" sz="2000" b="0" i="0" u="none" strike="noStrike">
-                <a:solidFill>
-                  <a:srgbClr val="2C2C2C"/>
-                </a:solidFill>
-                <a:ea typeface="Pretendard Regular"/>
-              </a:rPr>
-              <a:t>취업 준비생의 포트폴리오 제작 시간 단축</a:t>
-            </a:r>
-          </a:p>
-        </p:txBody>
-      </p:sp>
-      <p:sp>
-        <p:nvSpPr>
-          <p:cNvPr id="24" name="TextBox 24"/>
-          <p:cNvSpPr txBox="1"/>
-          <p:nvPr/>
-        </p:nvSpPr>
-        <p:spPr>
-          <a:xfrm>
-            <a:off x="1524000" y="927100"/>
-            <a:ext cx="3517900" cy="1981200"/>
-          </a:xfrm>
-          <a:prstGeom prst="rect">
-            <a:avLst/>
-          </a:prstGeom>
-        </p:spPr>
-        <p:txBody>
-          <a:bodyPr lIns="0" tIns="0" rIns="0" bIns="0" rtlCol="0" anchor="t">
-            <a:noAutofit/>
-          </a:bodyPr>
-          <a:lstStyle/>
-          <a:p>
-            <a:pPr lvl="0" algn="l">
-              <a:lnSpc>
-                <a:spcPct val="99600"/>
-              </a:lnSpc>
-            </a:pPr>
-            <a:r>
-              <a:rPr lang="en-US" altLang="ko-KR" sz="3347" b="0" i="0" u="none" strike="noStrike" dirty="0">
-                <a:solidFill>
-                  <a:srgbClr val="2C2C2C"/>
-                </a:solidFill>
-                <a:latin typeface="Pretendard ExtraBold" panose="020B0600000101010101" charset="-127"/>
-                <a:ea typeface="Pretendard ExtraBold" panose="020B0600000101010101" charset="-127"/>
+                <a:latin typeface="Pretendard ExtraBold"/>
               </a:rPr>
               <a:t>POPOL 포트폴리오 서비스</a:t>
             </a:r>
@@ -6828,47 +8155,8 @@
               <a:solidFill>
                 <a:srgbClr val="2C2C2C"/>
               </a:solidFill>
-              <a:latin typeface="Pretendard ExtraBold" panose="020B0600000101010101" charset="-127"/>
-              <a:ea typeface="Pretendard ExtraBold" panose="020B0600000101010101" charset="-127"/>
+              <a:ea typeface="Pretendard ExtraBold"/>
             </a:endParaRPr>
-          </a:p>
-        </p:txBody>
-      </p:sp>
-      <p:sp>
-        <p:nvSpPr>
-          <p:cNvPr id="25" name="TextBox 25"/>
-          <p:cNvSpPr txBox="1"/>
-          <p:nvPr/>
-        </p:nvSpPr>
-        <p:spPr>
-          <a:xfrm>
-            <a:off x="1574800" y="2933700"/>
-            <a:ext cx="3619500" cy="355600"/>
-          </a:xfrm>
-          <a:prstGeom prst="rect">
-            <a:avLst/>
-          </a:prstGeom>
-        </p:spPr>
-        <p:txBody>
-          <a:bodyPr lIns="0" tIns="0" rIns="0" bIns="0" rtlCol="0" anchor="t">
-            <a:noAutofit/>
-          </a:bodyPr>
-          <a:lstStyle/>
-          <a:p>
-            <a:pPr lvl="0" algn="l">
-              <a:lnSpc>
-                <a:spcPct val="99600"/>
-              </a:lnSpc>
-            </a:pPr>
-            <a:r>
-              <a:rPr lang="en-US" sz="1433" b="0" i="0" u="none" strike="noStrike">
-                <a:solidFill>
-                  <a:srgbClr val="207CD7"/>
-                </a:solidFill>
-                <a:latin typeface="Pretendard Bold"/>
-              </a:rPr>
-              <a:t>2025.09 - 2026.02</a:t>
-            </a:r>
           </a:p>
         </p:txBody>
       </p:sp>
@@ -6970,54 +8258,6 @@
       </p:pic>
       <p:pic>
         <p:nvPicPr>
-          <p:cNvPr id="5" name="Picture 5"/>
-          <p:cNvPicPr>
-            <a:picLocks noChangeAspect="1"/>
-          </p:cNvPicPr>
-          <p:nvPr/>
-        </p:nvPicPr>
-        <p:blipFill>
-          <a:blip r:embed="rId4"/>
-          <a:stretch>
-            <a:fillRect/>
-          </a:stretch>
-        </p:blipFill>
-        <p:spPr>
-          <a:xfrm>
-            <a:off x="12141200" y="4711700"/>
-            <a:ext cx="5080000" cy="4406900"/>
-          </a:xfrm>
-          <a:prstGeom prst="rect">
-            <a:avLst/>
-          </a:prstGeom>
-        </p:spPr>
-      </p:pic>
-      <p:pic>
-        <p:nvPicPr>
-          <p:cNvPr id="6" name="Picture 6"/>
-          <p:cNvPicPr>
-            <a:picLocks noChangeAspect="1"/>
-          </p:cNvPicPr>
-          <p:nvPr/>
-        </p:nvPicPr>
-        <p:blipFill>
-          <a:blip r:embed="rId5"/>
-          <a:stretch>
-            <a:fillRect/>
-          </a:stretch>
-        </p:blipFill>
-        <p:spPr>
-          <a:xfrm>
-            <a:off x="12382500" y="5041900"/>
-            <a:ext cx="4597400" cy="2247900"/>
-          </a:xfrm>
-          <a:prstGeom prst="rect">
-            <a:avLst/>
-          </a:prstGeom>
-        </p:spPr>
-      </p:pic>
-      <p:pic>
-        <p:nvPicPr>
           <p:cNvPr id="7" name="Picture 7"/>
           <p:cNvPicPr>
             <a:picLocks noChangeAspect="1"/>
@@ -7042,54 +8282,6 @@
       </p:pic>
       <p:pic>
         <p:nvPicPr>
-          <p:cNvPr id="8" name="Picture 8"/>
-          <p:cNvPicPr>
-            <a:picLocks noChangeAspect="1"/>
-          </p:cNvPicPr>
-          <p:nvPr/>
-        </p:nvPicPr>
-        <p:blipFill>
-          <a:blip r:embed="rId4"/>
-          <a:stretch>
-            <a:fillRect/>
-          </a:stretch>
-        </p:blipFill>
-        <p:spPr>
-          <a:xfrm>
-            <a:off x="6731000" y="4711700"/>
-            <a:ext cx="5080000" cy="4406900"/>
-          </a:xfrm>
-          <a:prstGeom prst="rect">
-            <a:avLst/>
-          </a:prstGeom>
-        </p:spPr>
-      </p:pic>
-      <p:pic>
-        <p:nvPicPr>
-          <p:cNvPr id="9" name="Picture 9"/>
-          <p:cNvPicPr>
-            <a:picLocks noChangeAspect="1"/>
-          </p:cNvPicPr>
-          <p:nvPr/>
-        </p:nvPicPr>
-        <p:blipFill>
-          <a:blip r:embed="rId5"/>
-          <a:stretch>
-            <a:fillRect/>
-          </a:stretch>
-        </p:blipFill>
-        <p:spPr>
-          <a:xfrm>
-            <a:off x="6985000" y="5041900"/>
-            <a:ext cx="4597400" cy="2247900"/>
-          </a:xfrm>
-          <a:prstGeom prst="rect">
-            <a:avLst/>
-          </a:prstGeom>
-        </p:spPr>
-      </p:pic>
-      <p:pic>
-        <p:nvPicPr>
           <p:cNvPr id="10" name="Picture 10"/>
           <p:cNvPicPr>
             <a:picLocks noChangeAspect="1"/>
@@ -7114,30 +8306,6 @@
       </p:pic>
       <p:pic>
         <p:nvPicPr>
-          <p:cNvPr id="11" name="Picture 11"/>
-          <p:cNvPicPr>
-            <a:picLocks noChangeAspect="1"/>
-          </p:cNvPicPr>
-          <p:nvPr/>
-        </p:nvPicPr>
-        <p:blipFill>
-          <a:blip r:embed="rId8"/>
-          <a:stretch>
-            <a:fillRect/>
-          </a:stretch>
-        </p:blipFill>
-        <p:spPr>
-          <a:xfrm>
-            <a:off x="6731000" y="1143000"/>
-            <a:ext cx="10490200" cy="2146300"/>
-          </a:xfrm>
-          <a:prstGeom prst="rect">
-            <a:avLst/>
-          </a:prstGeom>
-        </p:spPr>
-      </p:pic>
-      <p:pic>
-        <p:nvPicPr>
           <p:cNvPr id="12" name="Picture 12"/>
           <p:cNvPicPr>
             <a:picLocks noChangeAspect="1"/>
@@ -7259,13 +8427,13 @@
               </a:lnSpc>
             </a:pPr>
             <a:r>
-              <a:rPr lang="ko-KR" sz="1900" b="0" i="0" u="none" strike="noStrike">
+              <a:rPr lang="ko-KR" sz="1608" b="0" i="0" u="none" strike="noStrike">
                 <a:solidFill>
                   <a:srgbClr val="2C2C2C"/>
                 </a:solidFill>
                 <a:ea typeface="Pretendard Regular"/>
               </a:rPr>
-              <a:t>우승</a:t>
+              <a:t>주간 텍스트 잘림 제보가 12건에서 0건으로 감소했으며, 포트폴리오 변환 시간이 8시간에서 10분으로 단축되었습니다.</a:t>
             </a:r>
           </a:p>
         </p:txBody>
@@ -7303,7 +8471,7 @@
                 </a:solidFill>
                 <a:ea typeface="Pretendard Bold"/>
               </a:rPr>
-              <a:t>채용공고</a:t>
+              <a:t>8시간 → 10분</a:t>
             </a:r>
           </a:p>
         </p:txBody>
@@ -7335,13 +8503,13 @@
               </a:lnSpc>
             </a:pPr>
             <a:r>
-              <a:rPr lang="ko-KR" sz="1900" b="0" i="0" u="none" strike="noStrike">
+              <a:rPr lang="ko-KR" sz="1608" b="0" i="0" u="none" strike="noStrike">
                 <a:solidFill>
                   <a:srgbClr val="2C2C2C"/>
                 </a:solidFill>
                 <a:ea typeface="Pretendard Regular"/>
               </a:rPr>
-              <a:t/>
+              <a:t>노션 구조를 분석하여 슬라이드 자동 구성 로직을 설계하고, 렌더링 파이프라인 전체를 측정 가능한 단위로 쪼개는 설계를 적용했습니다.</a:t>
             </a:r>
           </a:p>
         </p:txBody>
@@ -7379,7 +8547,7 @@
                 </a:solidFill>
                 <a:ea typeface="Pretendard Bold"/>
               </a:rPr>
-              <a:t>AI</a:t>
+              <a:t>12건 → 0건</a:t>
             </a:r>
           </a:p>
         </p:txBody>
@@ -7417,7 +8585,7 @@
                 </a:solidFill>
                 <a:ea typeface="Pretendard Regular"/>
               </a:rPr>
-              <a:t>2025.11</a:t>
+              <a:t>텍스트 잘림</a:t>
             </a:r>
           </a:p>
         </p:txBody>
@@ -7455,7 +8623,7 @@
                 </a:solidFill>
                 <a:ea typeface="Pretendard Bold"/>
               </a:rPr>
-              <a:t>대상</a:t>
+              <a:t>8시간</a:t>
             </a:r>
           </a:p>
         </p:txBody>
@@ -7487,13 +8655,13 @@
               </a:lnSpc>
             </a:pPr>
             <a:r>
-              <a:rPr lang="en-US" sz="1318" b="0" i="0" u="none" strike="noStrike">
+              <a:rPr lang="en-US" sz="1433" b="0" i="0" u="none" strike="noStrike">
                 <a:solidFill>
                   <a:srgbClr val="2C2C2C"/>
                 </a:solidFill>
                 <a:latin typeface="Pretendard Regular"/>
               </a:rPr>
-              <a:t>AI 기반 채용공고 분석 기능을 36시간 안에 구현하여 대상을 수상했습니다.</a:t>
+              <a:t>변환 파이프라인 설계 및 프론트엔드 미리보기 개발을 담당했습니다.</a:t>
             </a:r>
           </a:p>
         </p:txBody>
@@ -7531,7 +8699,7 @@
                 </a:solidFill>
                 <a:ea typeface="Pretendard Bold"/>
               </a:rPr>
-              <a:t>팀장</a:t>
+              <a:t>문제 정의</a:t>
             </a:r>
           </a:p>
         </p:txBody>
@@ -7563,13 +8731,13 @@
               </a:lnSpc>
             </a:pPr>
             <a:r>
-              <a:rPr lang="ko-KR" sz="2370" b="0" i="0" u="none" strike="noStrike">
+              <a:rPr lang="ko-KR" sz="2800" b="0" i="0" u="none" strike="noStrike">
                 <a:solidFill>
                   <a:srgbClr val="2C2C2C"/>
                 </a:solidFill>
                 <a:ea typeface="Pretendard Bold"/>
               </a:rPr>
-              <a:t>AI 채용공고 분석</a:t>
+              <a:t/>
             </a:r>
           </a:p>
         </p:txBody>
@@ -7601,13 +8769,13 @@
               </a:lnSpc>
             </a:pPr>
             <a:r>
-              <a:rPr lang="ko-KR" sz="2000" b="0" i="0" u="none" strike="noStrike">
+              <a:rPr lang="ko-KR" sz="1433" b="0" i="0" u="none" strike="noStrike">
                 <a:solidFill>
                   <a:srgbClr val="2C2C2C"/>
                 </a:solidFill>
                 <a:ea typeface="Pretendard Regular"/>
               </a:rPr>
-              <a:t>AI 기반 채용공고 분석 기능 구현</a:t>
+              <a:t>한글 전각 폭 기반 측정 모델을 만들어 폰트 자동 축소 로직을 통일하고, 미리보기와 다운로드 결과를 일치시켰습니다.</a:t>
             </a:r>
           </a:p>
         </p:txBody>
@@ -7639,13 +8807,13 @@
               </a:lnSpc>
             </a:pPr>
             <a:r>
-              <a:rPr lang="en-US" sz="1433" b="0" i="0" u="none" strike="noStrike">
+              <a:rPr lang="en-US" sz="900" b="0" i="0" u="none" strike="noStrike">
                 <a:solidFill>
                   <a:srgbClr val="207CD7"/>
                 </a:solidFill>
                 <a:latin typeface="Pretendard Bold"/>
               </a:rPr>
-              <a:t>36시간 내 구현</a:t>
+              <a:t>변환 파이프라인 설계와 프론트엔드 미리보기 개발을 맡았습니다.</a:t>
             </a:r>
           </a:p>
         </p:txBody>
@@ -7677,14 +8845,14 @@
               </a:lnSpc>
             </a:pPr>
             <a:r>
-              <a:rPr lang="en-US" altLang="ko-KR" sz="5078" dirty="0">
+              <a:rPr lang="en-US" altLang="ko-KR" sz="3347" dirty="0">
                 <a:solidFill>
                   <a:srgbClr val="2C2C2C"/>
                 </a:solidFill>
                 <a:latin typeface="Pretendard ExtraBold"/>
                 <a:ea typeface="Pretendard ExtraBold"/>
               </a:rPr>
-              <a:t>교내 해커톤 우승</a:t>
+              <a:t>POPOL 포트폴리오 서비스</a:t>
             </a:r>
             <a:endParaRPr lang="ko-KR" sz="6000" b="0" i="0" u="none" strike="noStrike" dirty="0">
               <a:solidFill>
@@ -7807,8 +8975,8 @@
         </p:blipFill>
         <p:spPr>
           <a:xfrm>
-            <a:off x="6680200" y="8382000"/>
-            <a:ext cx="10490200" cy="863600"/>
+            <a:off x="8966200" y="7975600"/>
+            <a:ext cx="8229600" cy="952500"/>
           </a:xfrm>
           <a:prstGeom prst="rect">
             <a:avLst/>
@@ -7831,8 +8999,8 @@
         </p:blipFill>
         <p:spPr>
           <a:xfrm>
-            <a:off x="6680200" y="7454900"/>
-            <a:ext cx="10490200" cy="863600"/>
+            <a:off x="8966200" y="6908800"/>
+            <a:ext cx="8229600" cy="952500"/>
           </a:xfrm>
           <a:prstGeom prst="rect">
             <a:avLst/>
@@ -7848,39 +9016,15 @@
           <p:nvPr/>
         </p:nvPicPr>
         <p:blipFill>
-          <a:blip r:embed="rId5"/>
+          <a:blip r:embed="rId4"/>
           <a:stretch>
             <a:fillRect/>
           </a:stretch>
         </p:blipFill>
         <p:spPr>
           <a:xfrm>
-            <a:off x="6680200" y="6527800"/>
-            <a:ext cx="10490200" cy="863600"/>
-          </a:xfrm>
-          <a:prstGeom prst="rect">
-            <a:avLst/>
-          </a:prstGeom>
-        </p:spPr>
-      </p:pic>
-      <p:pic>
-        <p:nvPicPr>
-          <p:cNvPr id="8" name="Picture 8"/>
-          <p:cNvPicPr>
-            <a:picLocks noChangeAspect="1"/>
-          </p:cNvPicPr>
-          <p:nvPr/>
-        </p:nvPicPr>
-        <p:blipFill>
-          <a:blip r:embed="rId5"/>
-          <a:stretch>
-            <a:fillRect/>
-          </a:stretch>
-        </p:blipFill>
-        <p:spPr>
-          <a:xfrm>
-            <a:off x="6680200" y="5588000"/>
-            <a:ext cx="10490200" cy="863600"/>
+            <a:off x="8966200" y="5854700"/>
+            <a:ext cx="8229600" cy="952500"/>
           </a:xfrm>
           <a:prstGeom prst="rect">
             <a:avLst/>
@@ -7896,15 +9040,17 @@
           <p:nvPr/>
         </p:nvPicPr>
         <p:blipFill>
-          <a:blip r:embed="rId6"/>
+          <a:blip r:embed="rId6">
+            <a:alphaModFix amt="70000"/>
+          </a:blip>
           <a:stretch>
             <a:fillRect/>
           </a:stretch>
         </p:blipFill>
         <p:spPr>
           <a:xfrm>
-            <a:off x="6680200" y="4622800"/>
-            <a:ext cx="10490200" cy="863600"/>
+            <a:off x="11277600" y="4660900"/>
+            <a:ext cx="1346200" cy="977900"/>
           </a:xfrm>
           <a:prstGeom prst="rect">
             <a:avLst/>
@@ -7920,15 +9066,15 @@
           <p:nvPr/>
         </p:nvPicPr>
         <p:blipFill>
-          <a:blip r:embed="rId7"/>
+          <a:blip r:embed="rId4"/>
           <a:stretch>
             <a:fillRect/>
           </a:stretch>
         </p:blipFill>
         <p:spPr>
           <a:xfrm>
-            <a:off x="13779500" y="1993900"/>
-            <a:ext cx="3416300" cy="2273300"/>
+            <a:off x="8966200" y="3479800"/>
+            <a:ext cx="8229600" cy="952500"/>
           </a:xfrm>
           <a:prstGeom prst="rect">
             <a:avLst/>
@@ -7944,15 +9090,15 @@
           <p:nvPr/>
         </p:nvPicPr>
         <p:blipFill>
-          <a:blip r:embed="rId7"/>
+          <a:blip r:embed="rId4"/>
           <a:stretch>
             <a:fillRect/>
           </a:stretch>
         </p:blipFill>
         <p:spPr>
           <a:xfrm>
-            <a:off x="10248900" y="1993900"/>
-            <a:ext cx="3416300" cy="2273300"/>
+            <a:off x="8966200" y="2413000"/>
+            <a:ext cx="8229600" cy="952500"/>
           </a:xfrm>
           <a:prstGeom prst="rect">
             <a:avLst/>
@@ -7968,39 +9114,15 @@
           <p:nvPr/>
         </p:nvPicPr>
         <p:blipFill>
-          <a:blip r:embed="rId7"/>
+          <a:blip r:embed="rId4"/>
           <a:stretch>
             <a:fillRect/>
           </a:stretch>
         </p:blipFill>
         <p:spPr>
           <a:xfrm>
-            <a:off x="6718300" y="1993900"/>
-            <a:ext cx="3416300" cy="2273300"/>
-          </a:xfrm>
-          <a:prstGeom prst="rect">
-            <a:avLst/>
-          </a:prstGeom>
-        </p:spPr>
-      </p:pic>
-      <p:pic>
-        <p:nvPicPr>
-          <p:cNvPr id="13" name="Picture 13"/>
-          <p:cNvPicPr>
-            <a:picLocks noChangeAspect="1"/>
-          </p:cNvPicPr>
-          <p:nvPr/>
-        </p:nvPicPr>
-        <p:blipFill>
-          <a:blip r:embed="rId6"/>
-          <a:stretch>
-            <a:fillRect/>
-          </a:stretch>
-        </p:blipFill>
-        <p:spPr>
-          <a:xfrm>
-            <a:off x="6731000" y="1028700"/>
-            <a:ext cx="10490200" cy="863600"/>
+            <a:off x="8966200" y="1346200"/>
+            <a:ext cx="8229600" cy="952500"/>
           </a:xfrm>
           <a:prstGeom prst="rect">
             <a:avLst/>
@@ -8063,8 +9185,236 @@
         </p:nvSpPr>
         <p:spPr>
           <a:xfrm>
-            <a:off x="10325100" y="8585200"/>
-            <a:ext cx="3200400" cy="495300"/>
+            <a:off x="10490200" y="8216900"/>
+            <a:ext cx="6489700" cy="495300"/>
+          </a:xfrm>
+          <a:prstGeom prst="rect">
+            <a:avLst/>
+          </a:prstGeom>
+        </p:spPr>
+        <p:txBody>
+          <a:bodyPr lIns="0" tIns="0" rIns="0" bIns="0" rtlCol="0" anchor="t">
+            <a:noAutofit/>
+          </a:bodyPr>
+          <a:lstStyle/>
+          <a:p>
+            <a:pPr lvl="0" algn="l">
+              <a:lnSpc>
+                <a:spcPct val="132800"/>
+              </a:lnSpc>
+            </a:pPr>
+            <a:r>
+              <a:rPr lang="ko-KR" sz="2800" b="0" i="0" u="none" strike="noStrike">
+                <a:solidFill>
+                  <a:srgbClr val="2C2C2C"/>
+                </a:solidFill>
+                <a:ea typeface="Pretendard Regular"/>
+              </a:rPr>
+              <a:t/>
+            </a:r>
+          </a:p>
+        </p:txBody>
+      </p:sp>
+      <p:sp>
+        <p:nvSpPr>
+          <p:cNvPr id="17" name="TextBox 17"/>
+          <p:cNvSpPr txBox="1"/>
+          <p:nvPr/>
+        </p:nvSpPr>
+        <p:spPr>
+          <a:xfrm>
+            <a:off x="9283700" y="8229600"/>
+            <a:ext cx="1231900" cy="495300"/>
+          </a:xfrm>
+          <a:prstGeom prst="rect">
+            <a:avLst/>
+          </a:prstGeom>
+        </p:spPr>
+        <p:txBody>
+          <a:bodyPr lIns="0" tIns="0" rIns="0" bIns="0" rtlCol="0" anchor="t">
+            <a:noAutofit/>
+          </a:bodyPr>
+          <a:lstStyle/>
+          <a:p>
+            <a:pPr lvl="0" algn="l">
+              <a:lnSpc>
+                <a:spcPct val="116199"/>
+              </a:lnSpc>
+            </a:pPr>
+            <a:r>
+              <a:rPr lang="ko-KR" sz="2800" b="0" i="0" u="none" strike="noStrike">
+                <a:solidFill>
+                  <a:srgbClr val="207CD7"/>
+                </a:solidFill>
+                <a:ea typeface="Pretendard Bold"/>
+              </a:rPr>
+              <a:t/>
+            </a:r>
+          </a:p>
+        </p:txBody>
+      </p:sp>
+      <p:sp>
+        <p:nvSpPr>
+          <p:cNvPr id="18" name="TextBox 18"/>
+          <p:cNvSpPr txBox="1"/>
+          <p:nvPr/>
+        </p:nvSpPr>
+        <p:spPr>
+          <a:xfrm>
+            <a:off x="10490200" y="7162800"/>
+            <a:ext cx="6489700" cy="495300"/>
+          </a:xfrm>
+          <a:prstGeom prst="rect">
+            <a:avLst/>
+          </a:prstGeom>
+        </p:spPr>
+        <p:txBody>
+          <a:bodyPr lIns="0" tIns="0" rIns="0" bIns="0" rtlCol="0" anchor="t">
+            <a:noAutofit/>
+          </a:bodyPr>
+          <a:lstStyle/>
+          <a:p>
+            <a:pPr lvl="0" algn="l">
+              <a:lnSpc>
+                <a:spcPct val="132800"/>
+              </a:lnSpc>
+            </a:pPr>
+            <a:r>
+              <a:rPr lang="ko-KR" sz="2370" b="0" i="0" u="none" strike="noStrike">
+                <a:solidFill>
+                  <a:srgbClr val="2C2C2C"/>
+                </a:solidFill>
+                <a:ea typeface="Pretendard Regular"/>
+              </a:rPr>
+              <a:t>결과</a:t>
+            </a:r>
+          </a:p>
+        </p:txBody>
+      </p:sp>
+      <p:sp>
+        <p:nvSpPr>
+          <p:cNvPr id="19" name="TextBox 19"/>
+          <p:cNvSpPr txBox="1"/>
+          <p:nvPr/>
+        </p:nvSpPr>
+        <p:spPr>
+          <a:xfrm>
+            <a:off x="9283700" y="7162800"/>
+            <a:ext cx="1231900" cy="495300"/>
+          </a:xfrm>
+          <a:prstGeom prst="rect">
+            <a:avLst/>
+          </a:prstGeom>
+        </p:spPr>
+        <p:txBody>
+          <a:bodyPr lIns="0" tIns="0" rIns="0" bIns="0" rtlCol="0" anchor="t">
+            <a:noAutofit/>
+          </a:bodyPr>
+          <a:lstStyle/>
+          <a:p>
+            <a:pPr lvl="0" algn="l">
+              <a:lnSpc>
+                <a:spcPct val="116199"/>
+              </a:lnSpc>
+            </a:pPr>
+            <a:r>
+              <a:rPr lang="ko-KR" sz="2370" b="0" i="0" u="none" strike="noStrike">
+                <a:solidFill>
+                  <a:srgbClr val="207CD7"/>
+                </a:solidFill>
+                <a:ea typeface="Pretendard Bold"/>
+              </a:rPr>
+              <a:t>98%</a:t>
+            </a:r>
+          </a:p>
+        </p:txBody>
+      </p:sp>
+      <p:sp>
+        <p:nvSpPr>
+          <p:cNvPr id="20" name="TextBox 20"/>
+          <p:cNvSpPr txBox="1"/>
+          <p:nvPr/>
+        </p:nvSpPr>
+        <p:spPr>
+          <a:xfrm>
+            <a:off x="10490200" y="6096000"/>
+            <a:ext cx="6489700" cy="495300"/>
+          </a:xfrm>
+          <a:prstGeom prst="rect">
+            <a:avLst/>
+          </a:prstGeom>
+        </p:spPr>
+        <p:txBody>
+          <a:bodyPr lIns="0" tIns="0" rIns="0" bIns="0" rtlCol="0" anchor="t">
+            <a:noAutofit/>
+          </a:bodyPr>
+          <a:lstStyle/>
+          <a:p>
+            <a:pPr lvl="0" algn="l">
+              <a:lnSpc>
+                <a:spcPct val="132800"/>
+              </a:lnSpc>
+            </a:pPr>
+            <a:r>
+              <a:rPr lang="ko-KR" sz="2370" b="0" i="0" u="none" strike="noStrike">
+                <a:solidFill>
+                  <a:srgbClr val="2C2C2C"/>
+                </a:solidFill>
+                <a:ea typeface="Pretendard Regular"/>
+              </a:rPr>
+              <a:t>텍스트 잘림 제보가 주 12건에서 0건으로 감소</a:t>
+            </a:r>
+          </a:p>
+        </p:txBody>
+      </p:sp>
+      <p:sp>
+        <p:nvSpPr>
+          <p:cNvPr id="21" name="TextBox 21"/>
+          <p:cNvSpPr txBox="1"/>
+          <p:nvPr/>
+        </p:nvSpPr>
+        <p:spPr>
+          <a:xfrm>
+            <a:off x="9283700" y="6096000"/>
+            <a:ext cx="1231900" cy="495300"/>
+          </a:xfrm>
+          <a:prstGeom prst="rect">
+            <a:avLst/>
+          </a:prstGeom>
+        </p:spPr>
+        <p:txBody>
+          <a:bodyPr lIns="0" tIns="0" rIns="0" bIns="0" rtlCol="0" anchor="t">
+            <a:noAutofit/>
+          </a:bodyPr>
+          <a:lstStyle/>
+          <a:p>
+            <a:pPr lvl="0" algn="l">
+              <a:lnSpc>
+                <a:spcPct val="116199"/>
+              </a:lnSpc>
+            </a:pPr>
+            <a:r>
+              <a:rPr lang="ko-KR" sz="1119" b="0" i="0" u="none" strike="noStrike">
+                <a:solidFill>
+                  <a:srgbClr val="207CD7"/>
+                </a:solidFill>
+                <a:ea typeface="Pretendard Bold"/>
+              </a:rPr>
+              <a:t>수작업 대비 변환 시간 98% 단축</a:t>
+            </a:r>
+          </a:p>
+        </p:txBody>
+      </p:sp>
+      <p:sp>
+        <p:nvSpPr>
+          <p:cNvPr id="22" name="TextBox 22"/>
+          <p:cNvSpPr txBox="1"/>
+          <p:nvPr/>
+        </p:nvSpPr>
+        <p:spPr>
+          <a:xfrm>
+            <a:off x="6921500" y="7150100"/>
+            <a:ext cx="1701800" cy="495300"/>
           </a:xfrm>
           <a:prstGeom prst="rect">
             <a:avLst/>
@@ -8078,31 +9428,259 @@
           <a:p>
             <a:pPr lvl="0" algn="ctr">
               <a:lnSpc>
-                <a:spcPct val="99600"/>
-              </a:lnSpc>
-            </a:pPr>
-            <a:r>
-              <a:rPr lang="en-US" sz="2370" b="0" i="0" u="none" strike="noStrike">
+                <a:spcPct val="116199"/>
+              </a:lnSpc>
+            </a:pPr>
+            <a:r>
+              <a:rPr lang="ko-KR" sz="1119" b="0" i="0" u="none" strike="noStrike">
+                <a:solidFill>
+                  <a:srgbClr val="FFFFFF"/>
+                </a:solidFill>
+                <a:ea typeface="Pretendard Bold"/>
+              </a:rPr>
+              <a:t>노션 구조 분석 및 슬라이드 자동 구성</a:t>
+            </a:r>
+          </a:p>
+        </p:txBody>
+      </p:sp>
+      <p:sp>
+        <p:nvSpPr>
+          <p:cNvPr id="23" name="TextBox 23"/>
+          <p:cNvSpPr txBox="1"/>
+          <p:nvPr/>
+        </p:nvSpPr>
+        <p:spPr>
+          <a:xfrm>
+            <a:off x="10490200" y="3721100"/>
+            <a:ext cx="6489700" cy="495300"/>
+          </a:xfrm>
+          <a:prstGeom prst="rect">
+            <a:avLst/>
+          </a:prstGeom>
+        </p:spPr>
+        <p:txBody>
+          <a:bodyPr lIns="0" tIns="0" rIns="0" bIns="0" rtlCol="0" anchor="t">
+            <a:noAutofit/>
+          </a:bodyPr>
+          <a:lstStyle/>
+          <a:p>
+            <a:pPr lvl="0" algn="l">
+              <a:lnSpc>
+                <a:spcPct val="132800"/>
+              </a:lnSpc>
+            </a:pPr>
+            <a:r>
+              <a:rPr lang="ko-KR" sz="2370" b="0" i="0" u="none" strike="noStrike">
                 <a:solidFill>
                   <a:srgbClr val="2C2C2C"/>
                 </a:solidFill>
-                <a:latin typeface="Pretendard Bold"/>
-              </a:rPr>
-              <a:t>졸업 예정</a:t>
-            </a:r>
-          </a:p>
-        </p:txBody>
-      </p:sp>
-      <p:sp>
-        <p:nvSpPr>
-          <p:cNvPr id="17" name="TextBox 17"/>
-          <p:cNvSpPr txBox="1"/>
-          <p:nvPr/>
-        </p:nvSpPr>
-        <p:spPr>
-          <a:xfrm>
-            <a:off x="10325100" y="7645400"/>
-            <a:ext cx="3200400" cy="495300"/>
+                <a:ea typeface="Pretendard Regular"/>
+              </a:rPr>
+              <a:t>포트폴리오 변환 시간</a:t>
+            </a:r>
+          </a:p>
+        </p:txBody>
+      </p:sp>
+      <p:sp>
+        <p:nvSpPr>
+          <p:cNvPr id="24" name="TextBox 24"/>
+          <p:cNvSpPr txBox="1"/>
+          <p:nvPr/>
+        </p:nvSpPr>
+        <p:spPr>
+          <a:xfrm>
+            <a:off x="9283700" y="3721100"/>
+            <a:ext cx="1231900" cy="495300"/>
+          </a:xfrm>
+          <a:prstGeom prst="rect">
+            <a:avLst/>
+          </a:prstGeom>
+        </p:spPr>
+        <p:txBody>
+          <a:bodyPr lIns="0" tIns="0" rIns="0" bIns="0" rtlCol="0" anchor="t">
+            <a:noAutofit/>
+          </a:bodyPr>
+          <a:lstStyle/>
+          <a:p>
+            <a:pPr lvl="0" algn="l">
+              <a:lnSpc>
+                <a:spcPct val="116199"/>
+              </a:lnSpc>
+            </a:pPr>
+            <a:r>
+              <a:rPr lang="ko-KR" sz="1562" b="0" i="0" u="none" strike="noStrike">
+                <a:solidFill>
+                  <a:srgbClr val="889EB4"/>
+                </a:solidFill>
+                <a:ea typeface="Pretendard Bold"/>
+              </a:rPr>
+              <a:t>8시간 → 10분</a:t>
+            </a:r>
+          </a:p>
+        </p:txBody>
+      </p:sp>
+      <p:sp>
+        <p:nvSpPr>
+          <p:cNvPr id="25" name="TextBox 25"/>
+          <p:cNvSpPr txBox="1"/>
+          <p:nvPr/>
+        </p:nvSpPr>
+        <p:spPr>
+          <a:xfrm>
+            <a:off x="10490200" y="2654300"/>
+            <a:ext cx="6489700" cy="495300"/>
+          </a:xfrm>
+          <a:prstGeom prst="rect">
+            <a:avLst/>
+          </a:prstGeom>
+        </p:spPr>
+        <p:txBody>
+          <a:bodyPr lIns="0" tIns="0" rIns="0" bIns="0" rtlCol="0" anchor="t">
+            <a:noAutofit/>
+          </a:bodyPr>
+          <a:lstStyle/>
+          <a:p>
+            <a:pPr lvl="0" algn="l">
+              <a:lnSpc>
+                <a:spcPct val="132800"/>
+              </a:lnSpc>
+            </a:pPr>
+            <a:r>
+              <a:rPr lang="ko-KR" sz="2370" b="0" i="0" u="none" strike="noStrike">
+                <a:solidFill>
+                  <a:srgbClr val="2C2C2C"/>
+                </a:solidFill>
+                <a:ea typeface="Pretendard Regular"/>
+              </a:rPr>
+              <a:t>변환 시간 단축</a:t>
+            </a:r>
+          </a:p>
+        </p:txBody>
+      </p:sp>
+      <p:sp>
+        <p:nvSpPr>
+          <p:cNvPr id="26" name="TextBox 26"/>
+          <p:cNvSpPr txBox="1"/>
+          <p:nvPr/>
+        </p:nvSpPr>
+        <p:spPr>
+          <a:xfrm>
+            <a:off x="9283700" y="2654300"/>
+            <a:ext cx="1231900" cy="495300"/>
+          </a:xfrm>
+          <a:prstGeom prst="rect">
+            <a:avLst/>
+          </a:prstGeom>
+        </p:spPr>
+        <p:txBody>
+          <a:bodyPr lIns="0" tIns="0" rIns="0" bIns="0" rtlCol="0" anchor="t">
+            <a:noAutofit/>
+          </a:bodyPr>
+          <a:lstStyle/>
+          <a:p>
+            <a:pPr lvl="0" algn="l">
+              <a:lnSpc>
+                <a:spcPct val="116199"/>
+              </a:lnSpc>
+            </a:pPr>
+            <a:r>
+              <a:rPr lang="ko-KR" sz="1698" b="0" i="0" u="none" strike="noStrike">
+                <a:solidFill>
+                  <a:srgbClr val="889EB4"/>
+                </a:solidFill>
+                <a:ea typeface="Pretendard Bold"/>
+              </a:rPr>
+              <a:t>텍스트 잘림</a:t>
+            </a:r>
+          </a:p>
+        </p:txBody>
+      </p:sp>
+      <p:sp>
+        <p:nvSpPr>
+          <p:cNvPr id="27" name="TextBox 27"/>
+          <p:cNvSpPr txBox="1"/>
+          <p:nvPr/>
+        </p:nvSpPr>
+        <p:spPr>
+          <a:xfrm>
+            <a:off x="10490200" y="1587500"/>
+            <a:ext cx="6489700" cy="495300"/>
+          </a:xfrm>
+          <a:prstGeom prst="rect">
+            <a:avLst/>
+          </a:prstGeom>
+        </p:spPr>
+        <p:txBody>
+          <a:bodyPr lIns="0" tIns="0" rIns="0" bIns="0" rtlCol="0" anchor="t">
+            <a:noAutofit/>
+          </a:bodyPr>
+          <a:lstStyle/>
+          <a:p>
+            <a:pPr lvl="0" algn="l">
+              <a:lnSpc>
+                <a:spcPct val="132800"/>
+              </a:lnSpc>
+            </a:pPr>
+            <a:r>
+              <a:rPr lang="ko-KR" sz="2370" b="0" i="0" u="none" strike="noStrike">
+                <a:solidFill>
+                  <a:srgbClr val="2C2C2C"/>
+                </a:solidFill>
+                <a:ea typeface="Pretendard Regular"/>
+              </a:rPr>
+              <a:t>변환 품질 개선</a:t>
+            </a:r>
+          </a:p>
+        </p:txBody>
+      </p:sp>
+      <p:sp>
+        <p:nvSpPr>
+          <p:cNvPr id="28" name="TextBox 28"/>
+          <p:cNvSpPr txBox="1"/>
+          <p:nvPr/>
+        </p:nvSpPr>
+        <p:spPr>
+          <a:xfrm>
+            <a:off x="9283700" y="1600200"/>
+            <a:ext cx="1231900" cy="495300"/>
+          </a:xfrm>
+          <a:prstGeom prst="rect">
+            <a:avLst/>
+          </a:prstGeom>
+        </p:spPr>
+        <p:txBody>
+          <a:bodyPr lIns="0" tIns="0" rIns="0" bIns="0" rtlCol="0" anchor="t">
+            <a:noAutofit/>
+          </a:bodyPr>
+          <a:lstStyle/>
+          <a:p>
+            <a:pPr lvl="0" algn="l">
+              <a:lnSpc>
+                <a:spcPct val="116199"/>
+              </a:lnSpc>
+            </a:pPr>
+            <a:r>
+              <a:rPr lang="ko-KR" sz="1845" b="0" i="0" u="none" strike="noStrike">
+                <a:solidFill>
+                  <a:srgbClr val="889EB4"/>
+                </a:solidFill>
+                <a:ea typeface="Pretendard Bold"/>
+              </a:rPr>
+              <a:t>12건 → 0건</a:t>
+            </a:r>
+          </a:p>
+        </p:txBody>
+      </p:sp>
+      <p:sp>
+        <p:nvSpPr>
+          <p:cNvPr id="29" name="TextBox 29"/>
+          <p:cNvSpPr txBox="1"/>
+          <p:nvPr/>
+        </p:nvSpPr>
+        <p:spPr>
+          <a:xfrm>
+            <a:off x="6921500" y="2654300"/>
+            <a:ext cx="1701800" cy="495300"/>
           </a:xfrm>
           <a:prstGeom prst="rect">
             <a:avLst/>
@@ -8116,404 +9694,24 @@
           <a:p>
             <a:pPr lvl="0" algn="ctr">
               <a:lnSpc>
-                <a:spcPct val="99600"/>
-              </a:lnSpc>
-            </a:pPr>
-            <a:r>
-              <a:rPr lang="en-US" sz="2800" b="0" i="0" u="none" strike="noStrike">
-                <a:solidFill>
-                  <a:srgbClr val="2C2C2C"/>
-                </a:solidFill>
-                <a:latin typeface="Pretendard Bold"/>
-              </a:rPr>
-              <a:t/>
-            </a:r>
-          </a:p>
-        </p:txBody>
-      </p:sp>
-      <p:sp>
-        <p:nvSpPr>
-          <p:cNvPr id="18" name="TextBox 18"/>
-          <p:cNvSpPr txBox="1"/>
-          <p:nvPr/>
-        </p:nvSpPr>
-        <p:spPr>
-          <a:xfrm>
-            <a:off x="10325100" y="6718300"/>
-            <a:ext cx="3200400" cy="495300"/>
-          </a:xfrm>
-          <a:prstGeom prst="rect">
-            <a:avLst/>
-          </a:prstGeom>
-        </p:spPr>
-        <p:txBody>
-          <a:bodyPr lIns="0" tIns="0" rIns="0" bIns="0" rtlCol="0" anchor="t">
-            <a:noAutofit/>
-          </a:bodyPr>
-          <a:lstStyle/>
-          <a:p>
-            <a:pPr lvl="0" algn="ctr">
-              <a:lnSpc>
-                <a:spcPct val="99600"/>
-              </a:lnSpc>
-            </a:pPr>
-            <a:r>
-              <a:rPr lang="en-US" sz="2800" b="0" i="0" u="none" strike="noStrike">
-                <a:solidFill>
-                  <a:srgbClr val="2C2C2C"/>
-                </a:solidFill>
-                <a:latin typeface="Pretendard Bold"/>
-              </a:rPr>
-              <a:t/>
-            </a:r>
-          </a:p>
-        </p:txBody>
-      </p:sp>
-      <p:sp>
-        <p:nvSpPr>
-          <p:cNvPr id="19" name="TextBox 19"/>
-          <p:cNvSpPr txBox="1"/>
-          <p:nvPr/>
-        </p:nvSpPr>
-        <p:spPr>
-          <a:xfrm>
-            <a:off x="10325100" y="5791200"/>
-            <a:ext cx="3200400" cy="495300"/>
-          </a:xfrm>
-          <a:prstGeom prst="rect">
-            <a:avLst/>
-          </a:prstGeom>
-        </p:spPr>
-        <p:txBody>
-          <a:bodyPr lIns="0" tIns="0" rIns="0" bIns="0" rtlCol="0" anchor="t">
-            <a:noAutofit/>
-          </a:bodyPr>
-          <a:lstStyle/>
-          <a:p>
-            <a:pPr lvl="0" algn="ctr">
-              <a:lnSpc>
-                <a:spcPct val="99600"/>
-              </a:lnSpc>
-            </a:pPr>
-            <a:r>
-              <a:rPr lang="en-US" sz="2800" b="0" i="0" u="none" strike="noStrike">
-                <a:solidFill>
-                  <a:srgbClr val="2C2C2C"/>
-                </a:solidFill>
-                <a:latin typeface="Pretendard Bold"/>
-              </a:rPr>
-              <a:t/>
-            </a:r>
-          </a:p>
-        </p:txBody>
-      </p:sp>
-      <p:sp>
-        <p:nvSpPr>
-          <p:cNvPr id="20" name="TextBox 20"/>
-          <p:cNvSpPr txBox="1"/>
-          <p:nvPr/>
-        </p:nvSpPr>
-        <p:spPr>
-          <a:xfrm>
-            <a:off x="10363200" y="4826000"/>
-            <a:ext cx="3200400" cy="495300"/>
-          </a:xfrm>
-          <a:prstGeom prst="rect">
-            <a:avLst/>
-          </a:prstGeom>
-        </p:spPr>
-        <p:txBody>
-          <a:bodyPr lIns="0" tIns="0" rIns="0" bIns="0" rtlCol="0" anchor="t">
-            <a:noAutofit/>
-          </a:bodyPr>
-          <a:lstStyle/>
-          <a:p>
-            <a:pPr lvl="0" algn="ctr">
-              <a:lnSpc>
-                <a:spcPct val="99600"/>
-              </a:lnSpc>
-            </a:pPr>
-            <a:r>
-              <a:rPr lang="ko-KR" sz="2800" b="0" i="0" u="none" strike="noStrike">
+                <a:spcPct val="116199"/>
+              </a:lnSpc>
+            </a:pPr>
+            <a:r>
+              <a:rPr lang="ko-KR" sz="1845" b="0" i="0" u="none" strike="noStrike">
                 <a:solidFill>
                   <a:srgbClr val="FFFFFF"/>
                 </a:solidFill>
                 <a:ea typeface="Pretendard Bold"/>
               </a:rPr>
-              <a:t/>
-            </a:r>
-          </a:p>
-        </p:txBody>
-      </p:sp>
-      <p:sp>
-        <p:nvSpPr>
-          <p:cNvPr id="21" name="TextBox 21"/>
-          <p:cNvSpPr txBox="1"/>
-          <p:nvPr/>
-        </p:nvSpPr>
-        <p:spPr>
-          <a:xfrm>
-            <a:off x="14084300" y="2921000"/>
-            <a:ext cx="2819400" cy="812800"/>
-          </a:xfrm>
-          <a:prstGeom prst="rect">
-            <a:avLst/>
-          </a:prstGeom>
-        </p:spPr>
-        <p:txBody>
-          <a:bodyPr lIns="0" tIns="0" rIns="0" bIns="0" rtlCol="0" anchor="t">
-            <a:noAutofit/>
-          </a:bodyPr>
-          <a:lstStyle/>
-          <a:p>
-            <a:pPr lvl="0" algn="ctr">
-              <a:lnSpc>
-                <a:spcPct val="132800"/>
-              </a:lnSpc>
-            </a:pPr>
-            <a:r>
-              <a:rPr lang="en-US" sz="4600" b="0" i="0" u="none" strike="noStrike">
-                <a:solidFill>
-                  <a:srgbClr val="207CD7"/>
-                </a:solidFill>
-                <a:latin typeface="Pretendard Bold"/>
-              </a:rPr>
-              <a:t/>
-            </a:r>
-          </a:p>
-        </p:txBody>
-      </p:sp>
-      <p:sp>
-        <p:nvSpPr>
-          <p:cNvPr id="22" name="TextBox 22"/>
-          <p:cNvSpPr txBox="1"/>
-          <p:nvPr/>
-        </p:nvSpPr>
-        <p:spPr>
-          <a:xfrm>
-            <a:off x="14109700" y="2527300"/>
-            <a:ext cx="2768600" cy="393700"/>
-          </a:xfrm>
-          <a:prstGeom prst="rect">
-            <a:avLst/>
-          </a:prstGeom>
-        </p:spPr>
-        <p:txBody>
-          <a:bodyPr lIns="0" tIns="0" rIns="0" bIns="0" rtlCol="0" anchor="t">
-            <a:noAutofit/>
-          </a:bodyPr>
-          <a:lstStyle/>
-          <a:p>
-            <a:pPr lvl="0" algn="ctr">
-              <a:lnSpc>
-                <a:spcPct val="132800"/>
-              </a:lnSpc>
-            </a:pPr>
-            <a:r>
-              <a:rPr lang="ko-KR" sz="1713" b="0" i="0" u="none" strike="noStrike">
-                <a:solidFill>
-                  <a:srgbClr val="2C2C2C"/>
-                </a:solidFill>
-                <a:ea typeface="Pretendard Bold"/>
-              </a:rPr>
-              <a:t>학사</a:t>
-            </a:r>
-          </a:p>
-        </p:txBody>
-      </p:sp>
-      <p:sp>
-        <p:nvSpPr>
-          <p:cNvPr id="23" name="TextBox 23"/>
-          <p:cNvSpPr txBox="1"/>
-          <p:nvPr/>
-        </p:nvSpPr>
-        <p:spPr>
-          <a:xfrm>
-            <a:off x="10553700" y="2921000"/>
-            <a:ext cx="2819400" cy="812800"/>
-          </a:xfrm>
-          <a:prstGeom prst="rect">
-            <a:avLst/>
-          </a:prstGeom>
-        </p:spPr>
-        <p:txBody>
-          <a:bodyPr lIns="0" tIns="0" rIns="0" bIns="0" rtlCol="0" anchor="t">
-            <a:noAutofit/>
-          </a:bodyPr>
-          <a:lstStyle/>
-          <a:p>
-            <a:pPr lvl="0" algn="ctr">
-              <a:lnSpc>
-                <a:spcPct val="132800"/>
-              </a:lnSpc>
-            </a:pPr>
-            <a:r>
-              <a:rPr lang="en-US" sz="4600" b="0" i="0" u="none" strike="noStrike">
-                <a:solidFill>
-                  <a:srgbClr val="207CD7"/>
-                </a:solidFill>
-                <a:latin typeface="Pretendard Bold"/>
-              </a:rPr>
-              <a:t/>
-            </a:r>
-          </a:p>
-        </p:txBody>
-      </p:sp>
-      <p:sp>
-        <p:nvSpPr>
-          <p:cNvPr id="24" name="TextBox 24"/>
-          <p:cNvSpPr txBox="1"/>
-          <p:nvPr/>
-        </p:nvSpPr>
-        <p:spPr>
-          <a:xfrm>
-            <a:off x="10579100" y="2527300"/>
-            <a:ext cx="2768600" cy="393700"/>
-          </a:xfrm>
-          <a:prstGeom prst="rect">
-            <a:avLst/>
-          </a:prstGeom>
-        </p:spPr>
-        <p:txBody>
-          <a:bodyPr lIns="0" tIns="0" rIns="0" bIns="0" rtlCol="0" anchor="t">
-            <a:noAutofit/>
-          </a:bodyPr>
-          <a:lstStyle/>
-          <a:p>
-            <a:pPr lvl="0" algn="ctr">
-              <a:lnSpc>
-                <a:spcPct val="132800"/>
-              </a:lnSpc>
-            </a:pPr>
-            <a:r>
-              <a:rPr lang="ko-KR" sz="1713" b="0" i="0" u="none" strike="noStrike">
-                <a:solidFill>
-                  <a:srgbClr val="2C2C2C"/>
-                </a:solidFill>
-                <a:ea typeface="Pretendard Bold"/>
-              </a:rPr>
-              <a:t>2021-2026</a:t>
-            </a:r>
-          </a:p>
-        </p:txBody>
-      </p:sp>
-      <p:sp>
-        <p:nvSpPr>
-          <p:cNvPr id="25" name="TextBox 25"/>
-          <p:cNvSpPr txBox="1"/>
-          <p:nvPr/>
-        </p:nvSpPr>
-        <p:spPr>
-          <a:xfrm>
-            <a:off x="7010400" y="2921000"/>
-            <a:ext cx="2819400" cy="812800"/>
-          </a:xfrm>
-          <a:prstGeom prst="rect">
-            <a:avLst/>
-          </a:prstGeom>
-        </p:spPr>
-        <p:txBody>
-          <a:bodyPr lIns="0" tIns="0" rIns="0" bIns="0" rtlCol="0" anchor="t">
-            <a:noAutofit/>
-          </a:bodyPr>
-          <a:lstStyle/>
-          <a:p>
-            <a:pPr lvl="0" algn="ctr">
-              <a:lnSpc>
-                <a:spcPct val="132800"/>
-              </a:lnSpc>
-            </a:pPr>
-            <a:r>
-              <a:rPr lang="en-US" sz="4600" b="0" i="0" u="none" strike="noStrike">
-                <a:solidFill>
-                  <a:srgbClr val="207CD7"/>
-                </a:solidFill>
-                <a:latin typeface="Pretendard Bold"/>
-              </a:rPr>
-              <a:t/>
-            </a:r>
-          </a:p>
-        </p:txBody>
-      </p:sp>
-      <p:sp>
-        <p:nvSpPr>
-          <p:cNvPr id="26" name="TextBox 26"/>
-          <p:cNvSpPr txBox="1"/>
-          <p:nvPr/>
-        </p:nvSpPr>
-        <p:spPr>
-          <a:xfrm>
-            <a:off x="7035800" y="2527300"/>
-            <a:ext cx="2768600" cy="393700"/>
-          </a:xfrm>
-          <a:prstGeom prst="rect">
-            <a:avLst/>
-          </a:prstGeom>
-        </p:spPr>
-        <p:txBody>
-          <a:bodyPr lIns="0" tIns="0" rIns="0" bIns="0" rtlCol="0" anchor="t">
-            <a:noAutofit/>
-          </a:bodyPr>
-          <a:lstStyle/>
-          <a:p>
-            <a:pPr lvl="0" algn="ctr">
-              <a:lnSpc>
-                <a:spcPct val="132800"/>
-              </a:lnSpc>
-            </a:pPr>
-            <a:r>
-              <a:rPr lang="ko-KR" sz="1713" b="0" i="0" u="none" strike="noStrike">
-                <a:solidFill>
-                  <a:srgbClr val="2C2C2C"/>
-                </a:solidFill>
-                <a:ea typeface="Pretendard Bold"/>
-              </a:rPr>
-              <a:t>컴퓨터공학과</a:t>
-            </a:r>
-          </a:p>
-        </p:txBody>
-      </p:sp>
-      <p:sp>
-        <p:nvSpPr>
-          <p:cNvPr id="27" name="TextBox 27"/>
-          <p:cNvSpPr txBox="1"/>
-          <p:nvPr/>
-        </p:nvSpPr>
-        <p:spPr>
-          <a:xfrm>
-            <a:off x="10363200" y="1231900"/>
-            <a:ext cx="3200400" cy="495300"/>
-          </a:xfrm>
-          <a:prstGeom prst="rect">
-            <a:avLst/>
-          </a:prstGeom>
-        </p:spPr>
-        <p:txBody>
-          <a:bodyPr lIns="0" tIns="0" rIns="0" bIns="0" rtlCol="0" anchor="t">
-            <a:noAutofit/>
-          </a:bodyPr>
-          <a:lstStyle/>
-          <a:p>
-            <a:pPr lvl="0" algn="ctr">
-              <a:lnSpc>
-                <a:spcPct val="99600"/>
-              </a:lnSpc>
-            </a:pPr>
-            <a:r>
-              <a:rPr lang="ko-KR" sz="2370" b="0" i="0" u="none" strike="noStrike">
-                <a:solidFill>
-                  <a:srgbClr val="FFFFFF"/>
-                </a:solidFill>
-                <a:ea typeface="Pretendard Bold"/>
-              </a:rPr>
-              <a:t>가천대학교</a:t>
-            </a:r>
-          </a:p>
-        </p:txBody>
-      </p:sp>
-      <p:sp>
-        <p:nvSpPr>
-          <p:cNvPr id="28" name="TextBox 28"/>
+              <a:t>주간 잘림 제보</a:t>
+            </a:r>
+          </a:p>
+        </p:txBody>
+      </p:sp>
+      <p:sp>
+        <p:nvSpPr>
+          <p:cNvPr id="30" name="TextBox 30"/>
           <p:cNvSpPr txBox="1"/>
           <p:nvPr/>
         </p:nvSpPr>
@@ -8544,14 +9742,14 @@
                 </a:solidFill>
                 <a:ea typeface="Pretendard Regular"/>
               </a:rPr>
-              <a:t>컴퓨터공학과 · 2021-2026</a:t>
-            </a:r>
-          </a:p>
-        </p:txBody>
-      </p:sp>
-      <p:sp>
-        <p:nvSpPr>
-          <p:cNvPr id="29" name="TextBox 29"/>
+              <a:t>한글 전각 폭 기반 측정 모델로 폰트 자동 축소 로직 통일</a:t>
+            </a:r>
+          </a:p>
+        </p:txBody>
+      </p:sp>
+      <p:sp>
+        <p:nvSpPr>
+          <p:cNvPr id="31" name="TextBox 31"/>
           <p:cNvSpPr txBox="1"/>
           <p:nvPr/>
         </p:nvSpPr>
@@ -8576,27 +9774,27 @@
               </a:lnSpc>
             </a:pPr>
             <a:r>
-              <a:rPr lang="en-US" sz="1433" b="0" i="0" u="none" strike="noStrike">
+              <a:rPr lang="en-US" sz="944" b="0" i="0" u="none" strike="noStrike">
                 <a:solidFill>
                   <a:srgbClr val="207CD7"/>
                 </a:solidFill>
                 <a:latin typeface="Pretendard Bold"/>
               </a:rPr>
-              <a:t>가천대학교 컴퓨터공학과</a:t>
-            </a:r>
-          </a:p>
-        </p:txBody>
-      </p:sp>
-      <p:sp>
-        <p:nvSpPr>
-          <p:cNvPr id="30" name="TextBox 30"/>
-          <p:cNvSpPr txBox="1"/>
-          <p:nvPr/>
-        </p:nvSpPr>
-        <p:spPr>
-          <a:xfrm>
-            <a:off x="534126" y="927826"/>
-            <a:ext cx="4711699" cy="1981200"/>
+              <a:t>생성된 PPT에서 텍스트가 박스를 넘쳐 잘리는 문제가 반복 보고됨</a:t>
+            </a:r>
+          </a:p>
+        </p:txBody>
+      </p:sp>
+      <p:sp>
+        <p:nvSpPr>
+          <p:cNvPr id="32" name="TextBox 32"/>
+          <p:cNvSpPr txBox="1"/>
+          <p:nvPr/>
+        </p:nvSpPr>
+        <p:spPr>
+          <a:xfrm>
+            <a:off x="1524000" y="927100"/>
+            <a:ext cx="3683000" cy="1981200"/>
           </a:xfrm>
           <a:prstGeom prst="rect">
             <a:avLst/>
@@ -8614,20 +9812,14 @@
               </a:lnSpc>
             </a:pPr>
             <a:r>
-              <a:rPr lang="en-US" sz="6000" b="0" i="0" u="none" strike="noStrike" dirty="0">
+              <a:rPr lang="ko-KR" sz="3347" b="0" i="0" u="none" strike="noStrike">
                 <a:solidFill>
                   <a:srgbClr val="2C2C2C"/>
                 </a:solidFill>
-                <a:latin typeface="Pretendard ExtraBold"/>
-              </a:rPr>
-              <a:t>학력</a:t>
-            </a:r>
-            <a:endParaRPr lang="ko-KR" sz="6000" b="0" i="0" u="none" strike="noStrike" dirty="0">
-              <a:solidFill>
-                <a:srgbClr val="2C2C2C"/>
-              </a:solidFill>
-              <a:ea typeface="Pretendard ExtraBold"/>
-            </a:endParaRPr>
+                <a:ea typeface="Pretendard ExtraBold"/>
+              </a:rPr>
+              <a:t>POPOL 포트폴리오 서비스</a:t>
+            </a:r>
           </a:p>
         </p:txBody>
       </p:sp>
@@ -8729,46 +9921,22 @@
       </p:pic>
       <p:pic>
         <p:nvPicPr>
-          <p:cNvPr id="5" name="Picture 5"/>
+          <p:cNvPr id="6" name="Picture 6"/>
           <p:cNvPicPr>
             <a:picLocks noChangeAspect="1"/>
           </p:cNvPicPr>
           <p:nvPr/>
         </p:nvPicPr>
         <p:blipFill>
-          <a:blip r:embed="rId4"/>
+          <a:blip r:embed="rId5"/>
           <a:stretch>
             <a:fillRect/>
           </a:stretch>
         </p:blipFill>
         <p:spPr>
-          <a:xfrm>
-            <a:off x="8966200" y="7975600"/>
-            <a:ext cx="8229600" cy="952500"/>
-          </a:xfrm>
-          <a:prstGeom prst="rect">
-            <a:avLst/>
-          </a:prstGeom>
-        </p:spPr>
-      </p:pic>
-      <p:pic>
-        <p:nvPicPr>
-          <p:cNvPr id="6" name="Picture 6"/>
-          <p:cNvPicPr>
-            <a:picLocks noChangeAspect="1"/>
-          </p:cNvPicPr>
-          <p:nvPr/>
-        </p:nvPicPr>
-        <p:blipFill>
-          <a:blip r:embed="rId4"/>
-          <a:stretch>
-            <a:fillRect/>
-          </a:stretch>
-        </p:blipFill>
-        <p:spPr>
-          <a:xfrm>
-            <a:off x="8966200" y="6908800"/>
-            <a:ext cx="8229600" cy="952500"/>
+          <a:xfrm rot="5400000">
+            <a:off x="10121900" y="8712200"/>
+            <a:ext cx="292100" cy="38100"/>
           </a:xfrm>
           <a:prstGeom prst="rect">
             <a:avLst/>
@@ -8784,15 +9952,15 @@
           <p:nvPr/>
         </p:nvPicPr>
         <p:blipFill>
-          <a:blip r:embed="rId4"/>
+          <a:blip r:embed="rId5"/>
           <a:stretch>
             <a:fillRect/>
           </a:stretch>
         </p:blipFill>
         <p:spPr>
-          <a:xfrm>
-            <a:off x="8966200" y="5854700"/>
-            <a:ext cx="8229600" cy="952500"/>
+          <a:xfrm rot="5400000">
+            <a:off x="10121900" y="8204200"/>
+            <a:ext cx="292100" cy="38100"/>
           </a:xfrm>
           <a:prstGeom prst="rect">
             <a:avLst/>
@@ -8814,9 +9982,9 @@
           </a:stretch>
         </p:blipFill>
         <p:spPr>
-          <a:xfrm>
-            <a:off x="6718300" y="5854700"/>
-            <a:ext cx="2108200" cy="3086100"/>
+          <a:xfrm rot="5400000">
+            <a:off x="10121900" y="7696200"/>
+            <a:ext cx="292100" cy="38100"/>
           </a:xfrm>
           <a:prstGeom prst="rect">
             <a:avLst/>
@@ -8832,41 +10000,15 @@
           <p:nvPr/>
         </p:nvPicPr>
         <p:blipFill>
-          <a:blip r:embed="rId6">
-            <a:alphaModFix amt="70000"/>
-          </a:blip>
+          <a:blip r:embed="rId6"/>
           <a:stretch>
             <a:fillRect/>
           </a:stretch>
         </p:blipFill>
         <p:spPr>
-          <a:xfrm>
-            <a:off x="11277600" y="4660900"/>
-            <a:ext cx="1346200" cy="977900"/>
-          </a:xfrm>
-          <a:prstGeom prst="rect">
-            <a:avLst/>
-          </a:prstGeom>
-        </p:spPr>
-      </p:pic>
-      <p:pic>
-        <p:nvPicPr>
-          <p:cNvPr id="10" name="Picture 10"/>
-          <p:cNvPicPr>
-            <a:picLocks noChangeAspect="1"/>
-          </p:cNvPicPr>
-          <p:nvPr/>
-        </p:nvPicPr>
-        <p:blipFill>
-          <a:blip r:embed="rId4"/>
-          <a:stretch>
-            <a:fillRect/>
-          </a:stretch>
-        </p:blipFill>
-        <p:spPr>
-          <a:xfrm>
-            <a:off x="8966200" y="3479800"/>
-            <a:ext cx="8229600" cy="952500"/>
+          <a:xfrm rot="5400000">
+            <a:off x="8788400" y="7912100"/>
+            <a:ext cx="1943100" cy="25400"/>
           </a:xfrm>
           <a:prstGeom prst="rect">
             <a:avLst/>
@@ -8882,15 +10024,15 @@
           <p:nvPr/>
         </p:nvPicPr>
         <p:blipFill>
-          <a:blip r:embed="rId4"/>
+          <a:blip r:embed="rId8"/>
           <a:stretch>
             <a:fillRect/>
           </a:stretch>
         </p:blipFill>
         <p:spPr>
           <a:xfrm>
-            <a:off x="8966200" y="2413000"/>
-            <a:ext cx="8229600" cy="952500"/>
+            <a:off x="6731000" y="1092200"/>
+            <a:ext cx="10490200" cy="838200"/>
           </a:xfrm>
           <a:prstGeom prst="rect">
             <a:avLst/>
@@ -8906,15 +10048,15 @@
           <p:nvPr/>
         </p:nvPicPr>
         <p:blipFill>
-          <a:blip r:embed="rId4"/>
+          <a:blip r:embed="rId9"/>
           <a:stretch>
             <a:fillRect/>
           </a:stretch>
         </p:blipFill>
         <p:spPr>
-          <a:xfrm>
-            <a:off x="8966200" y="1346200"/>
-            <a:ext cx="8229600" cy="952500"/>
+          <a:xfrm rot="5400000">
+            <a:off x="838200" y="5130800"/>
+            <a:ext cx="9525000" cy="25400"/>
           </a:xfrm>
           <a:prstGeom prst="rect">
             <a:avLst/>
@@ -8930,61 +10072,13 @@
           <p:nvPr/>
         </p:nvPicPr>
         <p:blipFill>
-          <a:blip r:embed="rId7"/>
+          <a:blip r:embed="rId10"/>
           <a:stretch>
             <a:fillRect/>
           </a:stretch>
         </p:blipFill>
         <p:spPr>
           <a:xfrm>
-            <a:off x="6718300" y="1346200"/>
-            <a:ext cx="2108200" cy="3086100"/>
-          </a:xfrm>
-          <a:prstGeom prst="rect">
-            <a:avLst/>
-          </a:prstGeom>
-        </p:spPr>
-      </p:pic>
-      <p:pic>
-        <p:nvPicPr>
-          <p:cNvPr id="14" name="Picture 14"/>
-          <p:cNvPicPr>
-            <a:picLocks noChangeAspect="1"/>
-          </p:cNvPicPr>
-          <p:nvPr/>
-        </p:nvPicPr>
-        <p:blipFill>
-          <a:blip r:embed="rId8"/>
-          <a:stretch>
-            <a:fillRect/>
-          </a:stretch>
-        </p:blipFill>
-        <p:spPr>
-          <a:xfrm rot="5400000">
-            <a:off x="838200" y="5130800"/>
-            <a:ext cx="9525000" cy="25400"/>
-          </a:xfrm>
-          <a:prstGeom prst="rect">
-            <a:avLst/>
-          </a:prstGeom>
-        </p:spPr>
-      </p:pic>
-      <p:pic>
-        <p:nvPicPr>
-          <p:cNvPr id="15" name="Picture 15"/>
-          <p:cNvPicPr>
-            <a:picLocks noChangeAspect="1"/>
-          </p:cNvPicPr>
-          <p:nvPr/>
-        </p:nvPicPr>
-        <p:blipFill>
-          <a:blip r:embed="rId9"/>
-          <a:stretch>
-            <a:fillRect/>
-          </a:stretch>
-        </p:blipFill>
-        <p:spPr>
-          <a:xfrm>
             <a:off x="1574800" y="3797300"/>
             <a:ext cx="381000" cy="50800"/>
           </a:xfrm>
@@ -8995,14 +10089,90 @@
       </p:pic>
       <p:sp>
         <p:nvSpPr>
+          <p:cNvPr id="14" name="TextBox 14"/>
+          <p:cNvSpPr txBox="1"/>
+          <p:nvPr/>
+        </p:nvSpPr>
+        <p:spPr>
+          <a:xfrm>
+            <a:off x="11252200" y="8559800"/>
+            <a:ext cx="4965700" cy="355600"/>
+          </a:xfrm>
+          <a:prstGeom prst="rect">
+            <a:avLst/>
+          </a:prstGeom>
+        </p:spPr>
+        <p:txBody>
+          <a:bodyPr lIns="0" tIns="0" rIns="0" bIns="0" rtlCol="0" anchor="t">
+            <a:noAutofit/>
+          </a:bodyPr>
+          <a:lstStyle/>
+          <a:p>
+            <a:pPr lvl="0" algn="l">
+              <a:lnSpc>
+                <a:spcPct val="132800"/>
+              </a:lnSpc>
+            </a:pPr>
+            <a:r>
+              <a:rPr lang="ko-KR" sz="2000" b="0" i="0" u="none" strike="noStrike">
+                <a:solidFill>
+                  <a:srgbClr val="2C2C2C"/>
+                </a:solidFill>
+                <a:ea typeface="Pretendard Regular"/>
+              </a:rPr>
+              <a:t/>
+            </a:r>
+          </a:p>
+        </p:txBody>
+      </p:sp>
+      <p:sp>
+        <p:nvSpPr>
+          <p:cNvPr id="15" name="TextBox 15"/>
+          <p:cNvSpPr txBox="1"/>
+          <p:nvPr/>
+        </p:nvSpPr>
+        <p:spPr>
+          <a:xfrm>
+            <a:off x="10439400" y="8559800"/>
+            <a:ext cx="749300" cy="355600"/>
+          </a:xfrm>
+          <a:prstGeom prst="rect">
+            <a:avLst/>
+          </a:prstGeom>
+        </p:spPr>
+        <p:txBody>
+          <a:bodyPr lIns="0" tIns="0" rIns="0" bIns="0" rtlCol="0" anchor="t">
+            <a:noAutofit/>
+          </a:bodyPr>
+          <a:lstStyle/>
+          <a:p>
+            <a:pPr lvl="0" algn="l">
+              <a:lnSpc>
+                <a:spcPct val="116199"/>
+              </a:lnSpc>
+            </a:pPr>
+            <a:r>
+              <a:rPr lang="ko-KR" sz="2000" b="0" i="0" u="none" strike="noStrike">
+                <a:solidFill>
+                  <a:srgbClr val="2C2C2C"/>
+                </a:solidFill>
+                <a:ea typeface="Pretendard Bold"/>
+              </a:rPr>
+              <a:t/>
+            </a:r>
+          </a:p>
+        </p:txBody>
+      </p:sp>
+      <p:sp>
+        <p:nvSpPr>
           <p:cNvPr id="16" name="TextBox 16"/>
           <p:cNvSpPr txBox="1"/>
           <p:nvPr/>
         </p:nvSpPr>
         <p:spPr>
           <a:xfrm>
-            <a:off x="10490200" y="8216900"/>
-            <a:ext cx="6489700" cy="495300"/>
+            <a:off x="11252200" y="8051800"/>
+            <a:ext cx="4965700" cy="355600"/>
           </a:xfrm>
           <a:prstGeom prst="rect">
             <a:avLst/>
@@ -9020,13 +10190,13 @@
               </a:lnSpc>
             </a:pPr>
             <a:r>
-              <a:rPr lang="ko-KR" sz="2800" b="0" i="0" u="none" strike="noStrike">
+              <a:rPr lang="ko-KR" sz="1433" b="0" i="0" u="none" strike="noStrike">
                 <a:solidFill>
                   <a:srgbClr val="2C2C2C"/>
                 </a:solidFill>
                 <a:ea typeface="Pretendard Regular"/>
               </a:rPr>
-              <a:t/>
+              <a:t>기능 구현</a:t>
             </a:r>
           </a:p>
         </p:txBody>
@@ -9039,8 +10209,8 @@
         </p:nvSpPr>
         <p:spPr>
           <a:xfrm>
-            <a:off x="9283700" y="8229600"/>
-            <a:ext cx="1231900" cy="495300"/>
+            <a:off x="10439400" y="8051800"/>
+            <a:ext cx="749300" cy="355600"/>
           </a:xfrm>
           <a:prstGeom prst="rect">
             <a:avLst/>
@@ -9058,13 +10228,13 @@
               </a:lnSpc>
             </a:pPr>
             <a:r>
-              <a:rPr lang="ko-KR" sz="2800" b="0" i="0" u="none" strike="noStrike">
-                <a:solidFill>
-                  <a:srgbClr val="207CD7"/>
+              <a:rPr lang="ko-KR" sz="900" b="0" i="0" u="none" strike="noStrike">
+                <a:solidFill>
+                  <a:srgbClr val="2C2C2C"/>
                 </a:solidFill>
                 <a:ea typeface="Pretendard Bold"/>
               </a:rPr>
-              <a:t/>
+              <a:t>채용공고 분석</a:t>
             </a:r>
           </a:p>
         </p:txBody>
@@ -9077,8 +10247,8 @@
         </p:nvSpPr>
         <p:spPr>
           <a:xfrm>
-            <a:off x="10490200" y="7162800"/>
-            <a:ext cx="6489700" cy="495300"/>
+            <a:off x="11252200" y="7543800"/>
+            <a:ext cx="4965700" cy="355600"/>
           </a:xfrm>
           <a:prstGeom prst="rect">
             <a:avLst/>
@@ -9096,13 +10266,13 @@
               </a:lnSpc>
             </a:pPr>
             <a:r>
-              <a:rPr lang="ko-KR" sz="2800" b="0" i="0" u="none" strike="noStrike">
+              <a:rPr lang="ko-KR" sz="1433" b="0" i="0" u="none" strike="noStrike">
                 <a:solidFill>
                   <a:srgbClr val="2C2C2C"/>
                 </a:solidFill>
                 <a:ea typeface="Pretendard Regular"/>
               </a:rPr>
-              <a:t/>
+              <a:t>36시간</a:t>
             </a:r>
           </a:p>
         </p:txBody>
@@ -9115,8 +10285,8 @@
         </p:nvSpPr>
         <p:spPr>
           <a:xfrm>
-            <a:off x="9283700" y="7162800"/>
-            <a:ext cx="1231900" cy="495300"/>
+            <a:off x="10439400" y="7556500"/>
+            <a:ext cx="749300" cy="355600"/>
           </a:xfrm>
           <a:prstGeom prst="rect">
             <a:avLst/>
@@ -9134,13 +10304,13 @@
               </a:lnSpc>
             </a:pPr>
             <a:r>
-              <a:rPr lang="ko-KR" sz="2800" b="0" i="0" u="none" strike="noStrike">
-                <a:solidFill>
-                  <a:srgbClr val="207CD7"/>
+              <a:rPr lang="ko-KR" sz="1433" b="0" i="0" u="none" strike="noStrike">
+                <a:solidFill>
+                  <a:srgbClr val="2C2C2C"/>
                 </a:solidFill>
                 <a:ea typeface="Pretendard Bold"/>
               </a:rPr>
-              <a:t/>
+              <a:t>AI</a:t>
             </a:r>
           </a:p>
         </p:txBody>
@@ -9153,8 +10323,8 @@
         </p:nvSpPr>
         <p:spPr>
           <a:xfrm>
-            <a:off x="10490200" y="6096000"/>
-            <a:ext cx="6489700" cy="495300"/>
+            <a:off x="10248900" y="6959600"/>
+            <a:ext cx="5969000" cy="355600"/>
           </a:xfrm>
           <a:prstGeom prst="rect">
             <a:avLst/>
@@ -9172,27 +10342,141 @@
               </a:lnSpc>
             </a:pPr>
             <a:r>
+              <a:rPr lang="ko-KR" sz="1433" b="0" i="0" u="none" strike="noStrike">
+                <a:solidFill>
+                  <a:srgbClr val="2C2C2C"/>
+                </a:solidFill>
+                <a:ea typeface="Pretendard Regular"/>
+              </a:rPr>
+              <a:t>36시간 내 AI 기반 채용공고 분석 기능 구현으로 대상을 수상했습니다.</a:t>
+            </a:r>
+          </a:p>
+        </p:txBody>
+      </p:sp>
+      <p:sp>
+        <p:nvSpPr>
+          <p:cNvPr id="21" name="TextBox 21"/>
+          <p:cNvSpPr txBox="1"/>
+          <p:nvPr/>
+        </p:nvSpPr>
+        <p:spPr>
+          <a:xfrm>
+            <a:off x="7251700" y="6972300"/>
+            <a:ext cx="2133600" cy="495300"/>
+          </a:xfrm>
+          <a:prstGeom prst="rect">
+            <a:avLst/>
+          </a:prstGeom>
+        </p:spPr>
+        <p:txBody>
+          <a:bodyPr lIns="0" tIns="0" rIns="0" bIns="0" rtlCol="0" anchor="t">
+            <a:noAutofit/>
+          </a:bodyPr>
+          <a:lstStyle/>
+          <a:p>
+            <a:pPr lvl="0" algn="l">
+              <a:lnSpc>
+                <a:spcPct val="116199"/>
+              </a:lnSpc>
+            </a:pPr>
+            <a:r>
               <a:rPr lang="ko-KR" sz="2370" b="0" i="0" u="none" strike="noStrike">
                 <a:solidFill>
                   <a:srgbClr val="2C2C2C"/>
                 </a:solidFill>
+                <a:ea typeface="Pretendard Bold"/>
+              </a:rPr>
+              <a:t>대상</a:t>
+            </a:r>
+          </a:p>
+        </p:txBody>
+      </p:sp>
+      <p:sp>
+        <p:nvSpPr>
+          <p:cNvPr id="22" name="TextBox 22"/>
+          <p:cNvSpPr txBox="1"/>
+          <p:nvPr/>
+        </p:nvSpPr>
+        <p:spPr>
+          <a:xfrm>
+            <a:off x="10363200" y="1282700"/>
+            <a:ext cx="3200400" cy="495300"/>
+          </a:xfrm>
+          <a:prstGeom prst="rect">
+            <a:avLst/>
+          </a:prstGeom>
+        </p:spPr>
+        <p:txBody>
+          <a:bodyPr lIns="0" tIns="0" rIns="0" bIns="0" rtlCol="0" anchor="t">
+            <a:noAutofit/>
+          </a:bodyPr>
+          <a:lstStyle/>
+          <a:p>
+            <a:pPr lvl="0" algn="ctr">
+              <a:lnSpc>
+                <a:spcPct val="99600"/>
+              </a:lnSpc>
+            </a:pPr>
+            <a:r>
+              <a:rPr lang="en-US" sz="2370" b="0" i="0" u="none" strike="noStrike">
+                <a:solidFill>
+                  <a:srgbClr val="FFFFFF"/>
+                </a:solidFill>
+                <a:latin typeface="Pretendard Bold"/>
+              </a:rPr>
+              <a:t>팀장</a:t>
+            </a:r>
+          </a:p>
+        </p:txBody>
+      </p:sp>
+      <p:sp>
+        <p:nvSpPr>
+          <p:cNvPr id="23" name="TextBox 23"/>
+          <p:cNvSpPr txBox="1"/>
+          <p:nvPr/>
+        </p:nvSpPr>
+        <p:spPr>
+          <a:xfrm>
+            <a:off x="1524000" y="4013200"/>
+            <a:ext cx="3416300" cy="762000"/>
+          </a:xfrm>
+          <a:prstGeom prst="rect">
+            <a:avLst/>
+          </a:prstGeom>
+        </p:spPr>
+        <p:txBody>
+          <a:bodyPr lIns="0" tIns="0" rIns="0" bIns="0" rtlCol="0" anchor="t">
+            <a:noAutofit/>
+          </a:bodyPr>
+          <a:lstStyle/>
+          <a:p>
+            <a:pPr lvl="0" algn="l">
+              <a:lnSpc>
+                <a:spcPct val="132800"/>
+              </a:lnSpc>
+            </a:pPr>
+            <a:r>
+              <a:rPr lang="ko-KR" sz="2000" b="0" i="0" u="none" strike="noStrike">
+                <a:solidFill>
+                  <a:srgbClr val="2C2C2C"/>
+                </a:solidFill>
                 <a:ea typeface="Pretendard Regular"/>
               </a:rPr>
-              <a:t>교내 해커톤</a:t>
-            </a:r>
-          </a:p>
-        </p:txBody>
-      </p:sp>
-      <p:sp>
-        <p:nvSpPr>
-          <p:cNvPr id="21" name="TextBox 21"/>
-          <p:cNvSpPr txBox="1"/>
-          <p:nvPr/>
-        </p:nvSpPr>
-        <p:spPr>
-          <a:xfrm>
-            <a:off x="9283700" y="6096000"/>
-            <a:ext cx="1231900" cy="495300"/>
+              <a:t>AI 기반 채용공고 분석 기능 구현</a:t>
+            </a:r>
+          </a:p>
+        </p:txBody>
+      </p:sp>
+      <p:sp>
+        <p:nvSpPr>
+          <p:cNvPr id="24" name="TextBox 24"/>
+          <p:cNvSpPr txBox="1"/>
+          <p:nvPr/>
+        </p:nvSpPr>
+        <p:spPr>
+          <a:xfrm>
+            <a:off x="1524000" y="927100"/>
+            <a:ext cx="3517900" cy="1981200"/>
           </a:xfrm>
           <a:prstGeom prst="rect">
             <a:avLst/>
@@ -9206,366 +10490,32 @@
           <a:p>
             <a:pPr lvl="0" algn="l">
               <a:lnSpc>
-                <a:spcPct val="116199"/>
-              </a:lnSpc>
-            </a:pPr>
-            <a:r>
-              <a:rPr lang="ko-KR" sz="2800" b="0" i="0" u="none" strike="noStrike">
-                <a:solidFill>
-                  <a:srgbClr val="207CD7"/>
-                </a:solidFill>
-                <a:ea typeface="Pretendard Bold"/>
-              </a:rPr>
-              <a:t/>
-            </a:r>
-          </a:p>
-        </p:txBody>
-      </p:sp>
-      <p:sp>
-        <p:nvSpPr>
-          <p:cNvPr id="22" name="TextBox 22"/>
-          <p:cNvSpPr txBox="1"/>
-          <p:nvPr/>
-        </p:nvSpPr>
-        <p:spPr>
-          <a:xfrm>
-            <a:off x="6921500" y="7150100"/>
-            <a:ext cx="1701800" cy="495300"/>
-          </a:xfrm>
-          <a:prstGeom prst="rect">
-            <a:avLst/>
-          </a:prstGeom>
-        </p:spPr>
-        <p:txBody>
-          <a:bodyPr lIns="0" tIns="0" rIns="0" bIns="0" rtlCol="0" anchor="t">
-            <a:noAutofit/>
-          </a:bodyPr>
-          <a:lstStyle/>
-          <a:p>
-            <a:pPr lvl="0" algn="ctr">
-              <a:lnSpc>
-                <a:spcPct val="116199"/>
-              </a:lnSpc>
-            </a:pPr>
-            <a:r>
-              <a:rPr lang="ko-KR" sz="2370" b="0" i="0" u="none" strike="noStrike">
-                <a:solidFill>
-                  <a:srgbClr val="FFFFFF"/>
-                </a:solidFill>
-                <a:ea typeface="Pretendard Bold"/>
-              </a:rPr>
-              <a:t>대상</a:t>
-            </a:r>
-          </a:p>
-        </p:txBody>
-      </p:sp>
-      <p:sp>
-        <p:nvSpPr>
-          <p:cNvPr id="23" name="TextBox 23"/>
-          <p:cNvSpPr txBox="1"/>
-          <p:nvPr/>
-        </p:nvSpPr>
-        <p:spPr>
-          <a:xfrm>
-            <a:off x="10490200" y="3721100"/>
-            <a:ext cx="6489700" cy="495300"/>
-          </a:xfrm>
-          <a:prstGeom prst="rect">
-            <a:avLst/>
-          </a:prstGeom>
-        </p:spPr>
-        <p:txBody>
-          <a:bodyPr lIns="0" tIns="0" rIns="0" bIns="0" rtlCol="0" anchor="t">
-            <a:noAutofit/>
-          </a:bodyPr>
-          <a:lstStyle/>
-          <a:p>
-            <a:pPr lvl="0" algn="l">
-              <a:lnSpc>
-                <a:spcPct val="132800"/>
-              </a:lnSpc>
-            </a:pPr>
-            <a:r>
-              <a:rPr lang="ko-KR" sz="2800" b="0" i="0" u="none" strike="noStrike">
+                <a:spcPct val="99600"/>
+              </a:lnSpc>
+            </a:pPr>
+            <a:r>
+              <a:rPr lang="en-US" altLang="ko-KR" sz="4298" b="0" i="0" u="none" strike="noStrike" dirty="0">
                 <a:solidFill>
                   <a:srgbClr val="2C2C2C"/>
                 </a:solidFill>
-                <a:ea typeface="Pretendard Regular"/>
-              </a:rPr>
-              <a:t/>
-            </a:r>
-          </a:p>
-        </p:txBody>
-      </p:sp>
-      <p:sp>
-        <p:nvSpPr>
-          <p:cNvPr id="24" name="TextBox 24"/>
-          <p:cNvSpPr txBox="1"/>
-          <p:nvPr/>
-        </p:nvSpPr>
-        <p:spPr>
-          <a:xfrm>
-            <a:off x="9283700" y="3721100"/>
-            <a:ext cx="1231900" cy="495300"/>
-          </a:xfrm>
-          <a:prstGeom prst="rect">
-            <a:avLst/>
-          </a:prstGeom>
-        </p:spPr>
-        <p:txBody>
-          <a:bodyPr lIns="0" tIns="0" rIns="0" bIns="0" rtlCol="0" anchor="t">
-            <a:noAutofit/>
-          </a:bodyPr>
-          <a:lstStyle/>
-          <a:p>
-            <a:pPr lvl="0" algn="l">
-              <a:lnSpc>
-                <a:spcPct val="116199"/>
-              </a:lnSpc>
-            </a:pPr>
-            <a:r>
-              <a:rPr lang="ko-KR" sz="2800" b="0" i="0" u="none" strike="noStrike">
-                <a:solidFill>
-                  <a:srgbClr val="889EB4"/>
-                </a:solidFill>
-                <a:ea typeface="Pretendard Bold"/>
-              </a:rPr>
-              <a:t/>
-            </a:r>
+                <a:latin typeface="Pretendard ExtraBold" panose="020B0600000101010101" charset="-127"/>
+                <a:ea typeface="Pretendard ExtraBold" panose="020B0600000101010101" charset="-127"/>
+              </a:rPr>
+              <a:t>교내 해커톤 우승 프로젝트</a:t>
+            </a:r>
+            <a:endParaRPr lang="ko-KR" sz="6000" b="0" i="0" u="none" strike="noStrike" dirty="0">
+              <a:solidFill>
+                <a:srgbClr val="2C2C2C"/>
+              </a:solidFill>
+              <a:latin typeface="Pretendard ExtraBold" panose="020B0600000101010101" charset="-127"/>
+              <a:ea typeface="Pretendard ExtraBold" panose="020B0600000101010101" charset="-127"/>
+            </a:endParaRPr>
           </a:p>
         </p:txBody>
       </p:sp>
       <p:sp>
         <p:nvSpPr>
           <p:cNvPr id="25" name="TextBox 25"/>
-          <p:cNvSpPr txBox="1"/>
-          <p:nvPr/>
-        </p:nvSpPr>
-        <p:spPr>
-          <a:xfrm>
-            <a:off x="10490200" y="2654300"/>
-            <a:ext cx="6489700" cy="495300"/>
-          </a:xfrm>
-          <a:prstGeom prst="rect">
-            <a:avLst/>
-          </a:prstGeom>
-        </p:spPr>
-        <p:txBody>
-          <a:bodyPr lIns="0" tIns="0" rIns="0" bIns="0" rtlCol="0" anchor="t">
-            <a:noAutofit/>
-          </a:bodyPr>
-          <a:lstStyle/>
-          <a:p>
-            <a:pPr lvl="0" algn="l">
-              <a:lnSpc>
-                <a:spcPct val="132800"/>
-              </a:lnSpc>
-            </a:pPr>
-            <a:r>
-              <a:rPr lang="ko-KR" sz="2800" b="0" i="0" u="none" strike="noStrike">
-                <a:solidFill>
-                  <a:srgbClr val="2C2C2C"/>
-                </a:solidFill>
-                <a:ea typeface="Pretendard Regular"/>
-              </a:rPr>
-              <a:t/>
-            </a:r>
-          </a:p>
-        </p:txBody>
-      </p:sp>
-      <p:sp>
-        <p:nvSpPr>
-          <p:cNvPr id="26" name="TextBox 26"/>
-          <p:cNvSpPr txBox="1"/>
-          <p:nvPr/>
-        </p:nvSpPr>
-        <p:spPr>
-          <a:xfrm>
-            <a:off x="9283700" y="2654300"/>
-            <a:ext cx="1231900" cy="495300"/>
-          </a:xfrm>
-          <a:prstGeom prst="rect">
-            <a:avLst/>
-          </a:prstGeom>
-        </p:spPr>
-        <p:txBody>
-          <a:bodyPr lIns="0" tIns="0" rIns="0" bIns="0" rtlCol="0" anchor="t">
-            <a:noAutofit/>
-          </a:bodyPr>
-          <a:lstStyle/>
-          <a:p>
-            <a:pPr lvl="0" algn="l">
-              <a:lnSpc>
-                <a:spcPct val="116199"/>
-              </a:lnSpc>
-            </a:pPr>
-            <a:r>
-              <a:rPr lang="ko-KR" sz="2800" b="0" i="0" u="none" strike="noStrike">
-                <a:solidFill>
-                  <a:srgbClr val="889EB4"/>
-                </a:solidFill>
-                <a:ea typeface="Pretendard Bold"/>
-              </a:rPr>
-              <a:t/>
-            </a:r>
-          </a:p>
-        </p:txBody>
-      </p:sp>
-      <p:sp>
-        <p:nvSpPr>
-          <p:cNvPr id="27" name="TextBox 27"/>
-          <p:cNvSpPr txBox="1"/>
-          <p:nvPr/>
-        </p:nvSpPr>
-        <p:spPr>
-          <a:xfrm>
-            <a:off x="10490200" y="1587500"/>
-            <a:ext cx="6489700" cy="495300"/>
-          </a:xfrm>
-          <a:prstGeom prst="rect">
-            <a:avLst/>
-          </a:prstGeom>
-        </p:spPr>
-        <p:txBody>
-          <a:bodyPr lIns="0" tIns="0" rIns="0" bIns="0" rtlCol="0" anchor="t">
-            <a:noAutofit/>
-          </a:bodyPr>
-          <a:lstStyle/>
-          <a:p>
-            <a:pPr lvl="0" algn="l">
-              <a:lnSpc>
-                <a:spcPct val="132800"/>
-              </a:lnSpc>
-            </a:pPr>
-            <a:r>
-              <a:rPr lang="ko-KR" sz="2800" b="0" i="0" u="none" strike="noStrike">
-                <a:solidFill>
-                  <a:srgbClr val="2C2C2C"/>
-                </a:solidFill>
-                <a:ea typeface="Pretendard Regular"/>
-              </a:rPr>
-              <a:t/>
-            </a:r>
-          </a:p>
-        </p:txBody>
-      </p:sp>
-      <p:sp>
-        <p:nvSpPr>
-          <p:cNvPr id="28" name="TextBox 28"/>
-          <p:cNvSpPr txBox="1"/>
-          <p:nvPr/>
-        </p:nvSpPr>
-        <p:spPr>
-          <a:xfrm>
-            <a:off x="9283700" y="1600200"/>
-            <a:ext cx="1231900" cy="495300"/>
-          </a:xfrm>
-          <a:prstGeom prst="rect">
-            <a:avLst/>
-          </a:prstGeom>
-        </p:spPr>
-        <p:txBody>
-          <a:bodyPr lIns="0" tIns="0" rIns="0" bIns="0" rtlCol="0" anchor="t">
-            <a:noAutofit/>
-          </a:bodyPr>
-          <a:lstStyle/>
-          <a:p>
-            <a:pPr lvl="0" algn="l">
-              <a:lnSpc>
-                <a:spcPct val="116199"/>
-              </a:lnSpc>
-            </a:pPr>
-            <a:r>
-              <a:rPr lang="ko-KR" sz="2370" b="0" i="0" u="none" strike="noStrike">
-                <a:solidFill>
-                  <a:srgbClr val="889EB4"/>
-                </a:solidFill>
-                <a:ea typeface="Pretendard Bold"/>
-              </a:rPr>
-              <a:t>2025.11</a:t>
-            </a:r>
-          </a:p>
-        </p:txBody>
-      </p:sp>
-      <p:sp>
-        <p:nvSpPr>
-          <p:cNvPr id="29" name="TextBox 29"/>
-          <p:cNvSpPr txBox="1"/>
-          <p:nvPr/>
-        </p:nvSpPr>
-        <p:spPr>
-          <a:xfrm>
-            <a:off x="6921500" y="2654300"/>
-            <a:ext cx="1701800" cy="495300"/>
-          </a:xfrm>
-          <a:prstGeom prst="rect">
-            <a:avLst/>
-          </a:prstGeom>
-        </p:spPr>
-        <p:txBody>
-          <a:bodyPr lIns="0" tIns="0" rIns="0" bIns="0" rtlCol="0" anchor="t">
-            <a:noAutofit/>
-          </a:bodyPr>
-          <a:lstStyle/>
-          <a:p>
-            <a:pPr lvl="0" algn="ctr">
-              <a:lnSpc>
-                <a:spcPct val="116199"/>
-              </a:lnSpc>
-            </a:pPr>
-            <a:r>
-              <a:rPr lang="ko-KR" sz="2370" b="0" i="0" u="none" strike="noStrike">
-                <a:solidFill>
-                  <a:srgbClr val="FFFFFF"/>
-                </a:solidFill>
-                <a:ea typeface="Pretendard Bold"/>
-              </a:rPr>
-              <a:t>가천대학교</a:t>
-            </a:r>
-          </a:p>
-        </p:txBody>
-      </p:sp>
-      <p:sp>
-        <p:nvSpPr>
-          <p:cNvPr id="30" name="TextBox 30"/>
-          <p:cNvSpPr txBox="1"/>
-          <p:nvPr/>
-        </p:nvSpPr>
-        <p:spPr>
-          <a:xfrm>
-            <a:off x="1524000" y="4013200"/>
-            <a:ext cx="3416300" cy="1168400"/>
-          </a:xfrm>
-          <a:prstGeom prst="rect">
-            <a:avLst/>
-          </a:prstGeom>
-        </p:spPr>
-        <p:txBody>
-          <a:bodyPr lIns="0" tIns="0" rIns="0" bIns="0" rtlCol="0" anchor="t">
-            <a:noAutofit/>
-          </a:bodyPr>
-          <a:lstStyle/>
-          <a:p>
-            <a:pPr lvl="0" algn="l">
-              <a:lnSpc>
-                <a:spcPct val="132800"/>
-              </a:lnSpc>
-            </a:pPr>
-            <a:r>
-              <a:rPr lang="ko-KR" sz="2000" b="0" i="0" u="none" strike="noStrike">
-                <a:solidFill>
-                  <a:srgbClr val="2C2C2C"/>
-                </a:solidFill>
-                <a:ea typeface="Pretendard Regular"/>
-              </a:rPr>
-              <a:t>가천대학교 · 2025.11</a:t>
-            </a:r>
-          </a:p>
-        </p:txBody>
-      </p:sp>
-      <p:sp>
-        <p:nvSpPr>
-          <p:cNvPr id="31" name="TextBox 31"/>
           <p:cNvSpPr txBox="1"/>
           <p:nvPr/>
         </p:nvSpPr>
@@ -9590,51 +10540,13 @@
               </a:lnSpc>
             </a:pPr>
             <a:r>
-              <a:rPr lang="en-US" sz="2000" b="0" i="0" u="none" strike="noStrike">
+              <a:rPr lang="en-US" sz="1433" b="0" i="0" u="none" strike="noStrike">
                 <a:solidFill>
                   <a:srgbClr val="207CD7"/>
                 </a:solidFill>
                 <a:latin typeface="Pretendard Bold"/>
               </a:rPr>
-              <a:t/>
-            </a:r>
-          </a:p>
-        </p:txBody>
-      </p:sp>
-      <p:sp>
-        <p:nvSpPr>
-          <p:cNvPr id="32" name="TextBox 32"/>
-          <p:cNvSpPr txBox="1"/>
-          <p:nvPr/>
-        </p:nvSpPr>
-        <p:spPr>
-          <a:xfrm>
-            <a:off x="1524000" y="927100"/>
-            <a:ext cx="3683000" cy="1981200"/>
-          </a:xfrm>
-          <a:prstGeom prst="rect">
-            <a:avLst/>
-          </a:prstGeom>
-        </p:spPr>
-        <p:txBody>
-          <a:bodyPr lIns="0" tIns="0" rIns="0" bIns="0" rtlCol="0" anchor="t">
-            <a:noAutofit/>
-          </a:bodyPr>
-          <a:lstStyle/>
-          <a:p>
-            <a:pPr lvl="0" algn="l">
-              <a:lnSpc>
-                <a:spcPct val="99600"/>
-              </a:lnSpc>
-            </a:pPr>
-            <a:r>
-              <a:rPr lang="ko-KR" sz="5520" b="0" i="0" u="none" strike="noStrike">
-                <a:solidFill>
-                  <a:srgbClr val="2C2C2C"/>
-                </a:solidFill>
-                <a:ea typeface="Pretendard ExtraBold"/>
-              </a:rPr>
-              <a:t>교내 해커톤 대상</a:t>
+              <a:t>2025.11</a:t>
             </a:r>
           </a:p>
         </p:txBody>
@@ -10050,13 +10962,13 @@
               </a:lnSpc>
             </a:pPr>
             <a:r>
-              <a:rPr lang="ko-KR" sz="2900" b="0" i="0" u="none" strike="noStrike">
+              <a:rPr lang="ko-KR" sz="2455" b="0" i="0" u="none" strike="noStrike">
                 <a:solidFill>
                   <a:srgbClr val="2C2C2C"/>
                 </a:solidFill>
                 <a:ea typeface="Pretendard Regular"/>
               </a:rPr>
-              <a:t/>
+              <a:t>학사</a:t>
             </a:r>
           </a:p>
         </p:txBody>
@@ -10088,13 +11000,13 @@
               </a:lnSpc>
             </a:pPr>
             <a:r>
-              <a:rPr lang="en-US" sz="4000" b="0" i="0" u="none" strike="noStrike">
+              <a:rPr lang="en-US" sz="2053" b="0" i="0" u="none" strike="noStrike">
                 <a:solidFill>
                   <a:srgbClr val="207CD7"/>
                 </a:solidFill>
                 <a:latin typeface="Pretendard Bold"/>
               </a:rPr>
-              <a:t/>
+              <a:t>2026</a:t>
             </a:r>
           </a:p>
         </p:txBody>
@@ -10246,7 +11158,7 @@
                 </a:solidFill>
                 <a:ea typeface="Pretendard Regular"/>
               </a:rPr>
-              <a:t>GitHub</a:t>
+              <a:t>졸업 예정</a:t>
             </a:r>
           </a:p>
         </p:txBody>
@@ -10278,13 +11190,13 @@
               </a:lnSpc>
             </a:pPr>
             <a:r>
-              <a:rPr lang="en-US" sz="1145" b="0" i="0" u="none" strike="noStrike">
+              <a:rPr lang="en-US" sz="4000" b="0" i="0" u="none" strike="noStrike">
                 <a:solidFill>
                   <a:srgbClr val="207CD7"/>
                 </a:solidFill>
                 <a:latin typeface="Pretendard Bold"/>
               </a:rPr>
-              <a:t>github.com/yushin55</a:t>
+              <a:t/>
             </a:r>
           </a:p>
         </p:txBody>
@@ -10322,7 +11234,7 @@
                 </a:solidFill>
                 <a:ea typeface="Pretendard Regular"/>
               </a:rPr>
-              <a:t>이메일</a:t>
+              <a:t>컴퓨터공학과</a:t>
             </a:r>
           </a:p>
         </p:txBody>
@@ -10354,13 +11266,13 @@
               </a:lnSpc>
             </a:pPr>
             <a:r>
-              <a:rPr lang="en-US" sz="969" b="0" i="0" u="none" strike="noStrike">
+              <a:rPr lang="en-US" sz="1471" b="0" i="0" u="none" strike="noStrike">
                 <a:solidFill>
                   <a:srgbClr val="6387AB"/>
                 </a:solidFill>
                 <a:latin typeface="Pretendard Bold"/>
               </a:rPr>
-              <a:t>wooxx3377@gachon.ac.kr</a:t>
+              <a:t>가천대학교</a:t>
             </a:r>
           </a:p>
         </p:txBody>
@@ -10392,13 +11304,13 @@
               </a:lnSpc>
             </a:pPr>
             <a:r>
-              <a:rPr lang="ko-KR" sz="2370" b="0" i="0" u="none" strike="noStrike">
+              <a:rPr lang="ko-KR" sz="2800" b="0" i="0" u="none" strike="noStrike">
                 <a:solidFill>
                   <a:srgbClr val="207CD7"/>
                 </a:solidFill>
                 <a:ea typeface="Pretendard Bold"/>
               </a:rPr>
-              <a:t>김유신</a:t>
+              <a:t/>
             </a:r>
           </a:p>
         </p:txBody>
@@ -10436,7 +11348,7 @@
                 </a:solidFill>
                 <a:latin typeface="Pretendard Regular"/>
               </a:rPr>
-              <a:t/>
+              <a:t>가천대학교 컴퓨터공학과 졸업 예정</a:t>
             </a:r>
           </a:p>
         </p:txBody>
@@ -10468,13 +11380,13 @@
               </a:lnSpc>
             </a:pPr>
             <a:r>
-              <a:rPr lang="en-US" sz="2000" b="0" i="0" u="none" strike="noStrike">
+              <a:rPr lang="en-US" sz="1433" b="0" i="0" u="none" strike="noStrike">
                 <a:solidFill>
                   <a:srgbClr val="207CD7"/>
                 </a:solidFill>
                 <a:latin typeface="Pretendard Bold"/>
               </a:rPr>
-              <a:t/>
+              <a:t>2021-2026</a:t>
             </a:r>
           </a:p>
         </p:txBody>
@@ -10512,7 +11424,7 @@
                 </a:solidFill>
                 <a:ea typeface="Pretendard ExtraBold"/>
               </a:rPr>
-              <a:t>연락처</a:t>
+              <a:t>학력</a:t>
             </a:r>
           </a:p>
         </p:txBody>
